--- a/courses/论语/论语_第2天.pptx
+++ b/courses/论语/论语_第2天.pptx
@@ -7,18 +7,6 @@
   <p:sldIdLst>
     <p:sldId id="256" r:id="rId7"/>
     <p:sldId id="257" r:id="rId8"/>
-    <p:sldId id="258" r:id="rId9"/>
-    <p:sldId id="259" r:id="rId10"/>
-    <p:sldId id="260" r:id="rId11"/>
-    <p:sldId id="261" r:id="rId12"/>
-    <p:sldId id="262" r:id="rId13"/>
-    <p:sldId id="263" r:id="rId14"/>
-    <p:sldId id="264" r:id="rId15"/>
-    <p:sldId id="265" r:id="rId16"/>
-    <p:sldId id="266" r:id="rId17"/>
-    <p:sldId id="267" r:id="rId18"/>
-    <p:sldId id="268" r:id="rId19"/>
-    <p:sldId id="269" r:id="rId20"/>
   </p:sldIdLst>
   <p:sldSz cx="9144000" cy="6858000" type="screen4x3"/>
   <p:notesSz cx="6858000" cy="9144000"/>
@@ -3174,7 +3162,7 @@
               </a:defRPr>
             </a:pPr>
             <a:r>
-              <a:t>Guo Xue Jing Dian Jing Du - Day 2</a:t>
+              <a:t>国学经典精读 · 第2天</a:t>
             </a:r>
           </a:p>
         </p:txBody>
@@ -3187,7 +3175,7 @@
         </p:nvSpPr>
         <p:spPr>
           <a:xfrm>
-            <a:off x="914400" y="2286000"/>
+            <a:off x="914400" y="2560320"/>
             <a:ext cx="7315200" cy="1371600"/>
           </a:xfrm>
           <a:prstGeom prst="rect">
@@ -3202,14 +3190,14 @@
           <a:lstStyle/>
           <a:p>
             <a:pPr algn="ctr">
-              <a:defRPr sz="6000" b="1">
+              <a:defRPr sz="5200" b="1">
                 <a:solidFill>
                   <a:srgbClr val="1E3C72"/>
                 </a:solidFill>
               </a:defRPr>
             </a:pPr>
             <a:r>
-              <a:t>为政第二 Wei Zheng Di Er</a:t>
+              <a:t>论语 · 为政第二</a:t>
             </a:r>
           </a:p>
         </p:txBody>
@@ -3217,90 +3205,6 @@
       <p:sp>
         <p:nvSpPr>
           <p:cNvPr id="5" name="TextBox 4"/>
-          <p:cNvSpPr txBox="1"/>
-          <p:nvPr/>
-        </p:nvSpPr>
-        <p:spPr>
-          <a:xfrm>
-            <a:off x="914400" y="3931920"/>
-            <a:ext cx="7315200" cy="914400"/>
-          </a:xfrm>
-          <a:prstGeom prst="rect">
-            <a:avLst/>
-          </a:prstGeom>
-          <a:noFill/>
-        </p:spPr>
-        <p:txBody>
-          <a:bodyPr wrap="none">
-            <a:spAutoFit/>
-          </a:bodyPr>
-          <a:lstStyle/>
-          <a:p>
-            <a:pPr algn="ctr">
-              <a:defRPr sz="2800">
-                <a:solidFill>
-                  <a:srgbClr val="666666"/>
-                </a:solidFill>
-              </a:defRPr>
-            </a:pPr>
-            <a:r>
-              <a:t>Wei Zheng Yi De (为政以德), Si Wu Xie (思无邪), Wen Gu Zhi Xin (温故知新)</a:t>
-            </a:r>
-          </a:p>
-        </p:txBody>
-      </p:sp>
-      <p:sp>
-        <p:nvSpPr>
-          <p:cNvPr id="6" name="Rounded Rectangle 5"/>
-          <p:cNvSpPr/>
-          <p:nvPr/>
-        </p:nvSpPr>
-        <p:spPr>
-          <a:xfrm>
-            <a:off x="1371600" y="5029200"/>
-            <a:ext cx="6400800" cy="1188720"/>
-          </a:xfrm>
-          <a:prstGeom prst="roundRect">
-            <a:avLst/>
-          </a:prstGeom>
-          <a:solidFill>
-            <a:srgbClr val="F5F5F0"/>
-          </a:solidFill>
-        </p:spPr>
-        <p:style>
-          <a:lnRef idx="1">
-            <a:schemeClr val="accent1"/>
-          </a:lnRef>
-          <a:fillRef idx="3">
-            <a:schemeClr val="accent1"/>
-          </a:fillRef>
-          <a:effectRef idx="2">
-            <a:schemeClr val="accent1"/>
-          </a:effectRef>
-          <a:fontRef idx="minor">
-            <a:schemeClr val="lt1"/>
-          </a:fontRef>
-        </p:style>
-        <p:txBody>
-          <a:bodyPr rtlCol="0" anchor="ctr" wrap="square"/>
-          <a:lstStyle/>
-          <a:p>
-            <a:pPr algn="ctr">
-              <a:defRPr sz="2400" i="1">
-                <a:solidFill>
-                  <a:srgbClr val="1E3C72"/>
-                </a:solidFill>
-              </a:defRPr>
-            </a:pPr>
-            <a:r>
-              <a:t>Zi Yue: 'Wei Zheng Yi De,</a:t>
-            </a:r>
-          </a:p>
-        </p:txBody>
-      </p:sp>
-      <p:sp>
-        <p:nvSpPr>
-          <p:cNvPr id="7" name="TextBox 6"/>
           <p:cNvSpPr txBox="1"/>
           <p:nvPr/>
         </p:nvSpPr>
@@ -3341,7 +3245,7 @@
 </p:sld>
 </file>
 
-<file path=ppt/slides/slide10.xml><?xml version="1.0" encoding="utf-8"?>
+<file path=ppt/slides/slide2.xml><?xml version="1.0" encoding="utf-8"?>
 <p:sld xmlns:a="http://schemas.openxmlformats.org/drawingml/2006/main" xmlns:p="http://schemas.openxmlformats.org/presentationml/2006/main" xmlns:r="http://schemas.openxmlformats.org/officeDocument/2006/relationships">
   <p:cSld>
     <p:spTree>
@@ -3424,7 +3328,7 @@
               </a:defRPr>
             </a:pPr>
             <a:r>
-              <a:t>Chapter 6 - Core Ideas</a:t>
+              <a:t>第2章 · 为政以德</a:t>
             </a:r>
           </a:p>
         </p:txBody>
@@ -3438,7 +3342,80 @@
         <p:spPr>
           <a:xfrm>
             <a:off x="457200" y="1371600"/>
-            <a:ext cx="8229600" cy="1371600"/>
+            <a:ext cx="8229600" cy="1645920"/>
+          </a:xfrm>
+          <a:prstGeom prst="roundRect">
+            <a:avLst/>
+          </a:prstGeom>
+          <a:solidFill>
+            <a:srgbClr val="F5F5F0"/>
+          </a:solidFill>
+        </p:spPr>
+        <p:style>
+          <a:lnRef idx="1">
+            <a:schemeClr val="accent1"/>
+          </a:lnRef>
+          <a:fillRef idx="3">
+            <a:schemeClr val="accent1"/>
+          </a:fillRef>
+          <a:effectRef idx="2">
+            <a:schemeClr val="accent1"/>
+          </a:effectRef>
+          <a:fontRef idx="minor">
+            <a:schemeClr val="lt1"/>
+          </a:fontRef>
+        </p:style>
+        <p:txBody>
+          <a:bodyPr rtlCol="0" anchor="ctr" wrap="square"/>
+          <a:lstStyle/>
+          <a:p>
+            <a:pPr algn="ctr">
+              <a:defRPr sz="1600" b="1">
+                <a:solidFill>
+                  <a:srgbClr val="1E3C72"/>
+                </a:solidFill>
+              </a:defRPr>
+            </a:pPr>
+            <a:r>
+              <a:t>[原文]</a:t>
+            </a:r>
+          </a:p>
+          <a:p>
+            <a:pPr>
+              <a:defRPr sz="2400">
+                <a:solidFill>
+                  <a:srgbClr val="333333"/>
+                </a:solidFill>
+              </a:defRPr>
+            </a:pPr>
+            <a:r>
+              <a:t>为政以德，譬如北辰，</a:t>
+            </a:r>
+          </a:p>
+          <a:p>
+            <a:pPr>
+              <a:defRPr sz="2400">
+                <a:solidFill>
+                  <a:srgbClr val="333333"/>
+                </a:solidFill>
+              </a:defRPr>
+            </a:pPr>
+            <a:r>
+              <a:t>居其所而众星共之。</a:t>
+            </a:r>
+          </a:p>
+        </p:txBody>
+      </p:sp>
+      <p:sp>
+        <p:nvSpPr>
+          <p:cNvPr id="5" name="Rounded Rectangle 4"/>
+          <p:cNvSpPr/>
+          <p:nvPr/>
+        </p:nvSpPr>
+        <p:spPr>
+          <a:xfrm>
+            <a:off x="457200" y="3200400"/>
+            <a:ext cx="8229600" cy="1188720"/>
           </a:xfrm>
           <a:prstGeom prst="roundRect">
             <a:avLst/>
@@ -3466,40 +3443,40 @@
           <a:lstStyle/>
           <a:p>
             <a:pPr algn="ctr">
-              <a:defRPr sz="2000" b="1">
+              <a:defRPr sz="1400" b="1">
+                <a:solidFill>
+                  <a:srgbClr val="C8DCFF"/>
+                </a:solidFill>
+              </a:defRPr>
+            </a:pPr>
+            <a:r>
+              <a:t>[Translation]</a:t>
+            </a:r>
+          </a:p>
+          <a:p>
+            <a:pPr>
+              <a:defRPr sz="1600">
                 <a:solidFill>
                   <a:srgbClr val="FFFFFF"/>
                 </a:solidFill>
               </a:defRPr>
             </a:pPr>
             <a:r>
-              <a:t>Core Concept</a:t>
-            </a:r>
-          </a:p>
-          <a:p>
-            <a:pPr>
-              <a:defRPr sz="1700">
-                <a:solidFill>
-                  <a:srgbClr val="E6E6E6"/>
-                </a:solidFill>
-              </a:defRPr>
-            </a:pPr>
-            <a:r>
-              <a:t>温故知新: Modern neuroscience finds that every time we recall a memory, we strengthe...</a:t>
-            </a:r>
-          </a:p>
-        </p:txBody>
-      </p:sp>
-      <p:sp>
-        <p:nvSpPr>
-          <p:cNvPr id="5" name="TextBox 4"/>
+              <a:t>Govern with virtue, and the people will be like the North Star - it keeps its place while all the stars pay homage to it.</a:t>
+            </a:r>
+          </a:p>
+        </p:txBody>
+      </p:sp>
+      <p:sp>
+        <p:nvSpPr>
+          <p:cNvPr id="6" name="TextBox 5"/>
           <p:cNvSpPr txBox="1"/>
           <p:nvPr/>
         </p:nvSpPr>
         <p:spPr>
           <a:xfrm>
-            <a:off x="457200" y="2926080"/>
-            <a:ext cx="8229600" cy="1097280"/>
+            <a:off x="457200" y="4572000"/>
+            <a:ext cx="8229600" cy="365760"/>
           </a:xfrm>
           <a:prstGeom prst="rect">
             <a:avLst/>
@@ -3507,46 +3484,46 @@
           <a:noFill/>
         </p:spPr>
         <p:txBody>
-          <a:bodyPr wrap="square">
+          <a:bodyPr wrap="none">
             <a:spAutoFit/>
           </a:bodyPr>
           <a:lstStyle/>
           <a:p>
             <a:pPr>
-              <a:defRPr sz="1900" b="1">
+              <a:defRPr sz="1600" b="1">
                 <a:solidFill>
                   <a:srgbClr val="1E3C72"/>
                 </a:solidFill>
               </a:defRPr>
             </a:pPr>
             <a:r>
-              <a:t>1. 温故为基</a:t>
+              <a:t>1. Rule by Virtue</a:t>
             </a:r>
           </a:p>
           <a:p>
             <a:pPr>
-              <a:defRPr sz="1600">
+              <a:defRPr sz="1400">
                 <a:solidFill>
                   <a:srgbClr val="333333"/>
                 </a:solidFill>
               </a:defRPr>
             </a:pPr>
             <a:r>
-              <a:t>学习首先要打好基础，反复温习是学习的必经之路——没有白学的知识。</a:t>
-            </a:r>
-          </a:p>
-        </p:txBody>
-      </p:sp>
-      <p:sp>
-        <p:nvSpPr>
-          <p:cNvPr id="6" name="TextBox 5"/>
+              <a:t>为政以德：用德行治理国家</a:t>
+            </a:r>
+          </a:p>
+        </p:txBody>
+      </p:sp>
+      <p:sp>
+        <p:nvSpPr>
+          <p:cNvPr id="7" name="TextBox 6"/>
           <p:cNvSpPr txBox="1"/>
           <p:nvPr/>
         </p:nvSpPr>
         <p:spPr>
           <a:xfrm>
-            <a:off x="457200" y="4023360"/>
-            <a:ext cx="8229600" cy="1097280"/>
+            <a:off x="457200" y="5349240"/>
+            <a:ext cx="8229600" cy="365760"/>
           </a:xfrm>
           <a:prstGeom prst="rect">
             <a:avLst/>
@@ -3554,46 +3531,46 @@
           <a:noFill/>
         </p:spPr>
         <p:txBody>
-          <a:bodyPr wrap="square">
+          <a:bodyPr wrap="none">
             <a:spAutoFit/>
           </a:bodyPr>
           <a:lstStyle/>
           <a:p>
             <a:pPr>
-              <a:defRPr sz="1900" b="1">
+              <a:defRPr sz="1600" b="1">
                 <a:solidFill>
                   <a:srgbClr val="1E3C72"/>
                 </a:solidFill>
               </a:defRPr>
             </a:pPr>
             <a:r>
-              <a:t>2. 知新是进</a:t>
+              <a:t>2. Like the North Star</a:t>
             </a:r>
           </a:p>
           <a:p>
             <a:pPr>
-              <a:defRPr sz="1600">
+              <a:defRPr sz="1400">
                 <a:solidFill>
                   <a:srgbClr val="333333"/>
                 </a:solidFill>
               </a:defRPr>
             </a:pPr>
             <a:r>
-              <a:t>在旧知识中发现新意义是进步的标志——同样的话在不同人生阶段有不同感悟。</a:t>
-            </a:r>
-          </a:p>
-        </p:txBody>
-      </p:sp>
-      <p:sp>
-        <p:nvSpPr>
-          <p:cNvPr id="7" name="TextBox 6"/>
+              <a:t>譬如北辰：有德的领导者像北极星一样</a:t>
+            </a:r>
+          </a:p>
+        </p:txBody>
+      </p:sp>
+      <p:sp>
+        <p:nvSpPr>
+          <p:cNvPr id="8" name="TextBox 7"/>
           <p:cNvSpPr txBox="1"/>
           <p:nvPr/>
         </p:nvSpPr>
         <p:spPr>
           <a:xfrm>
-            <a:off x="457200" y="5120640"/>
-            <a:ext cx="8229600" cy="1097280"/>
+            <a:off x="457200" y="6126479"/>
+            <a:ext cx="8229600" cy="365760"/>
           </a:xfrm>
           <a:prstGeom prst="rect">
             <a:avLst/>
@@ -3601,39 +3578,39 @@
           <a:noFill/>
         </p:spPr>
         <p:txBody>
-          <a:bodyPr wrap="square">
+          <a:bodyPr wrap="none">
             <a:spAutoFit/>
           </a:bodyPr>
           <a:lstStyle/>
           <a:p>
             <a:pPr>
-              <a:defRPr sz="1900" b="1">
+              <a:defRPr sz="1600" b="1">
                 <a:solidFill>
                   <a:srgbClr val="1E3C72"/>
                 </a:solidFill>
               </a:defRPr>
             </a:pPr>
             <a:r>
-              <a:t>3. 师道尊严</a:t>
+              <a:t>3. Natural Attraction</a:t>
             </a:r>
           </a:p>
           <a:p>
             <a:pPr>
-              <a:defRPr sz="1600">
+              <a:defRPr sz="1400">
                 <a:solidFill>
                   <a:srgbClr val="333333"/>
                 </a:solidFill>
               </a:defRPr>
             </a:pPr>
             <a:r>
-              <a:t>能'温故知新'的人才配当老师——老师不是知识的唯一来源，而是引导你发现的人。</a:t>
-            </a:r>
-          </a:p>
-        </p:txBody>
-      </p:sp>
-      <p:sp>
-        <p:nvSpPr>
-          <p:cNvPr id="8" name="TextBox 7"/>
+              <a:t>众星共之：不需要强迫，人心自然归附</a:t>
+            </a:r>
+          </a:p>
+        </p:txBody>
+      </p:sp>
+      <p:sp>
+        <p:nvSpPr>
+          <p:cNvPr id="9" name="TextBox 8"/>
           <p:cNvSpPr txBox="1"/>
           <p:nvPr/>
         </p:nvSpPr>
@@ -3661,3393 +3638,7 @@
               </a:defRPr>
             </a:pPr>
             <a:r>
-              <a:t>10/14</a:t>
-            </a:r>
-          </a:p>
-        </p:txBody>
-      </p:sp>
-    </p:spTree>
-  </p:cSld>
-  <p:clrMapOvr>
-    <a:masterClrMapping/>
-  </p:clrMapOvr>
-</p:sld>
-</file>
-
-<file path=ppt/slides/slide11.xml><?xml version="1.0" encoding="utf-8"?>
-<p:sld xmlns:a="http://schemas.openxmlformats.org/drawingml/2006/main" xmlns:p="http://schemas.openxmlformats.org/presentationml/2006/main" xmlns:r="http://schemas.openxmlformats.org/officeDocument/2006/relationships">
-  <p:cSld>
-    <p:spTree>
-      <p:nvGrpSpPr>
-        <p:cNvPr id="1" name=""/>
-        <p:cNvGrpSpPr/>
-        <p:nvPr/>
-      </p:nvGrpSpPr>
-      <p:grpSpPr/>
-      <p:sp>
-        <p:nvSpPr>
-          <p:cNvPr id="2" name="Rectangle 1"/>
-          <p:cNvSpPr/>
-          <p:nvPr/>
-        </p:nvSpPr>
-        <p:spPr>
-          <a:xfrm>
-            <a:off x="0" y="0"/>
-            <a:ext cx="9144000" cy="1188720"/>
-          </a:xfrm>
-          <a:prstGeom prst="rect">
-            <a:avLst/>
-          </a:prstGeom>
-          <a:solidFill>
-            <a:srgbClr val="1E3C72"/>
-          </a:solidFill>
-          <a:ln>
-            <a:noFill/>
-          </a:ln>
-        </p:spPr>
-        <p:style>
-          <a:lnRef idx="1">
-            <a:schemeClr val="accent1"/>
-          </a:lnRef>
-          <a:fillRef idx="3">
-            <a:schemeClr val="accent1"/>
-          </a:fillRef>
-          <a:effectRef idx="2">
-            <a:schemeClr val="accent1"/>
-          </a:effectRef>
-          <a:fontRef idx="minor">
-            <a:schemeClr val="lt1"/>
-          </a:fontRef>
-        </p:style>
-        <p:txBody>
-          <a:bodyPr rtlCol="0" anchor="ctr"/>
-          <a:lstStyle/>
-          <a:p>
-            <a:pPr algn="ctr"/>
-          </a:p>
-        </p:txBody>
-      </p:sp>
-      <p:sp>
-        <p:nvSpPr>
-          <p:cNvPr id="3" name="TextBox 2"/>
-          <p:cNvSpPr txBox="1"/>
-          <p:nvPr/>
-        </p:nvSpPr>
-        <p:spPr>
-          <a:xfrm>
-            <a:off x="457200" y="228600"/>
-            <a:ext cx="8229600" cy="731520"/>
-          </a:xfrm>
-          <a:prstGeom prst="rect">
-            <a:avLst/>
-          </a:prstGeom>
-          <a:noFill/>
-        </p:spPr>
-        <p:txBody>
-          <a:bodyPr wrap="none">
-            <a:spAutoFit/>
-          </a:bodyPr>
-          <a:lstStyle/>
-          <a:p>
-            <a:pPr>
-              <a:defRPr sz="3400" b="1">
-                <a:solidFill>
-                  <a:srgbClr val="FFFFFF"/>
-                </a:solidFill>
-              </a:defRPr>
-            </a:pPr>
-            <a:r>
-              <a:t>Western Thought Comparison</a:t>
-            </a:r>
-          </a:p>
-        </p:txBody>
-      </p:sp>
-      <p:sp>
-        <p:nvSpPr>
-          <p:cNvPr id="4" name="Rounded Rectangle 3"/>
-          <p:cNvSpPr/>
-          <p:nvPr/>
-        </p:nvSpPr>
-        <p:spPr>
-          <a:xfrm>
-            <a:off x="457200" y="1371600"/>
-            <a:ext cx="8229600" cy="1097280"/>
-          </a:xfrm>
-          <a:prstGeom prst="roundRect">
-            <a:avLst/>
-          </a:prstGeom>
-          <a:solidFill>
-            <a:srgbClr val="F5F5F0"/>
-          </a:solidFill>
-        </p:spPr>
-        <p:style>
-          <a:lnRef idx="1">
-            <a:schemeClr val="accent1"/>
-          </a:lnRef>
-          <a:fillRef idx="3">
-            <a:schemeClr val="accent1"/>
-          </a:fillRef>
-          <a:effectRef idx="2">
-            <a:schemeClr val="accent1"/>
-          </a:effectRef>
-          <a:fontRef idx="minor">
-            <a:schemeClr val="lt1"/>
-          </a:fontRef>
-        </p:style>
-        <p:txBody>
-          <a:bodyPr rtlCol="0" anchor="ctr" wrap="square"/>
-          <a:lstStyle/>
-          <a:p>
-            <a:pPr algn="ctr">
-              <a:defRPr sz="1700" b="1">
-                <a:solidFill>
-                  <a:srgbClr val="1E3C72"/>
-                </a:solidFill>
-              </a:defRPr>
-            </a:pPr>
-            <a:r>
-              <a:t>Machiavelli: The Prince</a:t>
-            </a:r>
-          </a:p>
-          <a:p>
-            <a:pPr>
-              <a:defRPr sz="1500">
-                <a:solidFill>
-                  <a:srgbClr val="333333"/>
-                </a:solidFill>
-              </a:defRPr>
-            </a:pPr>
-            <a:r>
-              <a:t>The prince should make the people love and fear him, but if only one can be chosen, being feared is safer than being loved. 1532</a:t>
-            </a:r>
-          </a:p>
-        </p:txBody>
-      </p:sp>
-      <p:sp>
-        <p:nvSpPr>
-          <p:cNvPr id="5" name="Rounded Rectangle 4"/>
-          <p:cNvSpPr/>
-          <p:nvPr/>
-        </p:nvSpPr>
-        <p:spPr>
-          <a:xfrm>
-            <a:off x="457200" y="2560320"/>
-            <a:ext cx="8229600" cy="1097280"/>
-          </a:xfrm>
-          <a:prstGeom prst="roundRect">
-            <a:avLst/>
-          </a:prstGeom>
-          <a:solidFill>
-            <a:srgbClr val="F5F5F0"/>
-          </a:solidFill>
-        </p:spPr>
-        <p:style>
-          <a:lnRef idx="1">
-            <a:schemeClr val="accent1"/>
-          </a:lnRef>
-          <a:fillRef idx="3">
-            <a:schemeClr val="accent1"/>
-          </a:fillRef>
-          <a:effectRef idx="2">
-            <a:schemeClr val="accent1"/>
-          </a:effectRef>
-          <a:fontRef idx="minor">
-            <a:schemeClr val="lt1"/>
-          </a:fontRef>
-        </p:style>
-        <p:txBody>
-          <a:bodyPr rtlCol="0" anchor="ctr" wrap="square"/>
-          <a:lstStyle/>
-          <a:p>
-            <a:pPr algn="ctr">
-              <a:defRPr sz="1700" b="1">
-                <a:solidFill>
-                  <a:srgbClr val="1E3C72"/>
-                </a:solidFill>
-              </a:defRPr>
-            </a:pPr>
-            <a:r>
-              <a:t>Rousseau: Social Contract</a:t>
-            </a:r>
-          </a:p>
-          <a:p>
-            <a:pPr>
-              <a:defRPr sz="1500">
-                <a:solidFill>
-                  <a:srgbClr val="333333"/>
-                </a:solidFill>
-              </a:defRPr>
-            </a:pPr>
-            <a:r>
-              <a:t>The legitimacy of rulers comes from the consent of the ruled, not from virtue or lineage. 1762</a:t>
-            </a:r>
-          </a:p>
-        </p:txBody>
-      </p:sp>
-      <p:sp>
-        <p:nvSpPr>
-          <p:cNvPr id="6" name="Rounded Rectangle 5"/>
-          <p:cNvSpPr/>
-          <p:nvPr/>
-        </p:nvSpPr>
-        <p:spPr>
-          <a:xfrm>
-            <a:off x="457200" y="3749039"/>
-            <a:ext cx="8229600" cy="1097280"/>
-          </a:xfrm>
-          <a:prstGeom prst="roundRect">
-            <a:avLst/>
-          </a:prstGeom>
-          <a:solidFill>
-            <a:srgbClr val="F5F5F0"/>
-          </a:solidFill>
-        </p:spPr>
-        <p:style>
-          <a:lnRef idx="1">
-            <a:schemeClr val="accent1"/>
-          </a:lnRef>
-          <a:fillRef idx="3">
-            <a:schemeClr val="accent1"/>
-          </a:fillRef>
-          <a:effectRef idx="2">
-            <a:schemeClr val="accent1"/>
-          </a:effectRef>
-          <a:fontRef idx="minor">
-            <a:schemeClr val="lt1"/>
-          </a:fontRef>
-        </p:style>
-        <p:txBody>
-          <a:bodyPr rtlCol="0" anchor="ctr" wrap="square"/>
-          <a:lstStyle/>
-          <a:p>
-            <a:pPr algn="ctr">
-              <a:defRPr sz="1700" b="1">
-                <a:solidFill>
-                  <a:srgbClr val="1E3C72"/>
-                </a:solidFill>
-              </a:defRPr>
-            </a:pPr>
-            <a:r>
-              <a:t>Jefferson: Democratic Thought</a:t>
-            </a:r>
-          </a:p>
-          <a:p>
-            <a:pPr>
-              <a:defRPr sz="1500">
-                <a:solidFill>
-                  <a:srgbClr val="333333"/>
-                </a:solidFill>
-              </a:defRPr>
-            </a:pPr>
-            <a:r>
-              <a:t>The best government is one that governs least - connecting with Confucian 'Wu Wei Er Zhi'. 1776</a:t>
-            </a:r>
-          </a:p>
-        </p:txBody>
-      </p:sp>
-      <p:sp>
-        <p:nvSpPr>
-          <p:cNvPr id="7" name="Rounded Rectangle 6"/>
-          <p:cNvSpPr/>
-          <p:nvPr/>
-        </p:nvSpPr>
-        <p:spPr>
-          <a:xfrm>
-            <a:off x="457200" y="4937759"/>
-            <a:ext cx="8229600" cy="1097280"/>
-          </a:xfrm>
-          <a:prstGeom prst="roundRect">
-            <a:avLst/>
-          </a:prstGeom>
-          <a:solidFill>
-            <a:srgbClr val="F5F5F0"/>
-          </a:solidFill>
-        </p:spPr>
-        <p:style>
-          <a:lnRef idx="1">
-            <a:schemeClr val="accent1"/>
-          </a:lnRef>
-          <a:fillRef idx="3">
-            <a:schemeClr val="accent1"/>
-          </a:fillRef>
-          <a:effectRef idx="2">
-            <a:schemeClr val="accent1"/>
-          </a:effectRef>
-          <a:fontRef idx="minor">
-            <a:schemeClr val="lt1"/>
-          </a:fontRef>
-        </p:style>
-        <p:txBody>
-          <a:bodyPr rtlCol="0" anchor="ctr" wrap="square"/>
-          <a:lstStyle/>
-          <a:p>
-            <a:pPr algn="ctr">
-              <a:defRPr sz="1700" b="1">
-                <a:solidFill>
-                  <a:srgbClr val="1E3C72"/>
-                </a:solidFill>
-              </a:defRPr>
-            </a:pPr>
-            <a:r>
-              <a:t>Greenleaf: Servant Leadership</a:t>
-            </a:r>
-          </a:p>
-          <a:p>
-            <a:pPr>
-              <a:defRPr sz="1500">
-                <a:solidFill>
-                  <a:srgbClr val="333333"/>
-                </a:solidFill>
-              </a:defRPr>
-            </a:pPr>
-            <a:r>
-              <a:t>True leaders are servants, leading by example rather than giving orders. 1989</a:t>
-            </a:r>
-          </a:p>
-        </p:txBody>
-      </p:sp>
-      <p:sp>
-        <p:nvSpPr>
-          <p:cNvPr id="8" name="TextBox 7"/>
-          <p:cNvSpPr txBox="1"/>
-          <p:nvPr/>
-        </p:nvSpPr>
-        <p:spPr>
-          <a:xfrm>
-            <a:off x="8229600" y="6583680"/>
-            <a:ext cx="731520" cy="274320"/>
-          </a:xfrm>
-          <a:prstGeom prst="rect">
-            <a:avLst/>
-          </a:prstGeom>
-          <a:noFill/>
-        </p:spPr>
-        <p:txBody>
-          <a:bodyPr wrap="none">
-            <a:spAutoFit/>
-          </a:bodyPr>
-          <a:lstStyle/>
-          <a:p>
-            <a:pPr algn="r">
-              <a:defRPr sz="1200">
-                <a:solidFill>
-                  <a:srgbClr val="969696"/>
-                </a:solidFill>
-              </a:defRPr>
-            </a:pPr>
-            <a:r>
-              <a:t>11/14</a:t>
-            </a:r>
-          </a:p>
-        </p:txBody>
-      </p:sp>
-    </p:spTree>
-  </p:cSld>
-  <p:clrMapOvr>
-    <a:masterClrMapping/>
-  </p:clrMapOvr>
-</p:sld>
-</file>
-
-<file path=ppt/slides/slide12.xml><?xml version="1.0" encoding="utf-8"?>
-<p:sld xmlns:a="http://schemas.openxmlformats.org/drawingml/2006/main" xmlns:p="http://schemas.openxmlformats.org/presentationml/2006/main" xmlns:r="http://schemas.openxmlformats.org/officeDocument/2006/relationships">
-  <p:cSld>
-    <p:spTree>
-      <p:nvGrpSpPr>
-        <p:cNvPr id="1" name=""/>
-        <p:cNvGrpSpPr/>
-        <p:nvPr/>
-      </p:nvGrpSpPr>
-      <p:grpSpPr/>
-      <p:sp>
-        <p:nvSpPr>
-          <p:cNvPr id="2" name="Rectangle 1"/>
-          <p:cNvSpPr/>
-          <p:nvPr/>
-        </p:nvSpPr>
-        <p:spPr>
-          <a:xfrm>
-            <a:off x="0" y="0"/>
-            <a:ext cx="9144000" cy="1188720"/>
-          </a:xfrm>
-          <a:prstGeom prst="rect">
-            <a:avLst/>
-          </a:prstGeom>
-          <a:solidFill>
-            <a:srgbClr val="1E3C72"/>
-          </a:solidFill>
-          <a:ln>
-            <a:noFill/>
-          </a:ln>
-        </p:spPr>
-        <p:style>
-          <a:lnRef idx="1">
-            <a:schemeClr val="accent1"/>
-          </a:lnRef>
-          <a:fillRef idx="3">
-            <a:schemeClr val="accent1"/>
-          </a:fillRef>
-          <a:effectRef idx="2">
-            <a:schemeClr val="accent1"/>
-          </a:effectRef>
-          <a:fontRef idx="minor">
-            <a:schemeClr val="lt1"/>
-          </a:fontRef>
-        </p:style>
-        <p:txBody>
-          <a:bodyPr rtlCol="0" anchor="ctr"/>
-          <a:lstStyle/>
-          <a:p>
-            <a:pPr algn="ctr"/>
-          </a:p>
-        </p:txBody>
-      </p:sp>
-      <p:sp>
-        <p:nvSpPr>
-          <p:cNvPr id="3" name="TextBox 2"/>
-          <p:cNvSpPr txBox="1"/>
-          <p:nvPr/>
-        </p:nvSpPr>
-        <p:spPr>
-          <a:xfrm>
-            <a:off x="457200" y="228600"/>
-            <a:ext cx="8229600" cy="731520"/>
-          </a:xfrm>
-          <a:prstGeom prst="rect">
-            <a:avLst/>
-          </a:prstGeom>
-          <a:noFill/>
-        </p:spPr>
-        <p:txBody>
-          <a:bodyPr wrap="none">
-            <a:spAutoFit/>
-          </a:bodyPr>
-          <a:lstStyle/>
-          <a:p>
-            <a:pPr>
-              <a:defRPr sz="3400" b="1">
-                <a:solidFill>
-                  <a:srgbClr val="FFFFFF"/>
-                </a:solidFill>
-              </a:defRPr>
-            </a:pPr>
-            <a:r>
-              <a:t>Modern Application</a:t>
-            </a:r>
-          </a:p>
-        </p:txBody>
-      </p:sp>
-      <p:sp>
-        <p:nvSpPr>
-          <p:cNvPr id="4" name="Rounded Rectangle 3"/>
-          <p:cNvSpPr/>
-          <p:nvPr/>
-        </p:nvSpPr>
-        <p:spPr>
-          <a:xfrm>
-            <a:off x="457200" y="1371600"/>
-            <a:ext cx="8229600" cy="1188720"/>
-          </a:xfrm>
-          <a:prstGeom prst="roundRect">
-            <a:avLst/>
-          </a:prstGeom>
-          <a:solidFill>
-            <a:srgbClr val="F5F5F0"/>
-          </a:solidFill>
-        </p:spPr>
-        <p:style>
-          <a:lnRef idx="1">
-            <a:schemeClr val="accent1"/>
-          </a:lnRef>
-          <a:fillRef idx="3">
-            <a:schemeClr val="accent1"/>
-          </a:fillRef>
-          <a:effectRef idx="2">
-            <a:schemeClr val="accent1"/>
-          </a:effectRef>
-          <a:fontRef idx="minor">
-            <a:schemeClr val="lt1"/>
-          </a:fontRef>
-        </p:style>
-        <p:txBody>
-          <a:bodyPr rtlCol="0" anchor="ctr" wrap="square"/>
-          <a:lstStyle/>
-          <a:p>
-            <a:pPr algn="ctr">
-              <a:defRPr sz="1800" b="1">
-                <a:solidFill>
-                  <a:srgbClr val="1E3C72"/>
-                </a:solidFill>
-              </a:defRPr>
-            </a:pPr>
-            <a:r>
-              <a:t>1. 为政以德</a:t>
-            </a:r>
-          </a:p>
-          <a:p>
-            <a:pPr>
-              <a:defRPr sz="1500">
-                <a:solidFill>
-                  <a:srgbClr val="333333"/>
-                </a:solidFill>
-              </a:defRPr>
-            </a:pPr>
-            <a:r>
-              <a:t>用道德而非刑罚来治理国家——领导者的德行感化民众，比强制更有效。</a:t>
-            </a:r>
-          </a:p>
-        </p:txBody>
-      </p:sp>
-      <p:sp>
-        <p:nvSpPr>
-          <p:cNvPr id="5" name="Rounded Rectangle 4"/>
-          <p:cNvSpPr/>
-          <p:nvPr/>
-        </p:nvSpPr>
-        <p:spPr>
-          <a:xfrm>
-            <a:off x="457200" y="2651760"/>
-            <a:ext cx="8229600" cy="1188720"/>
-          </a:xfrm>
-          <a:prstGeom prst="roundRect">
-            <a:avLst/>
-          </a:prstGeom>
-          <a:solidFill>
-            <a:srgbClr val="F5F5F0"/>
-          </a:solidFill>
-        </p:spPr>
-        <p:style>
-          <a:lnRef idx="1">
-            <a:schemeClr val="accent1"/>
-          </a:lnRef>
-          <a:fillRef idx="3">
-            <a:schemeClr val="accent1"/>
-          </a:fillRef>
-          <a:effectRef idx="2">
-            <a:schemeClr val="accent1"/>
-          </a:effectRef>
-          <a:fontRef idx="minor">
-            <a:schemeClr val="lt1"/>
-          </a:fontRef>
-        </p:style>
-        <p:txBody>
-          <a:bodyPr rtlCol="0" anchor="ctr" wrap="square"/>
-          <a:lstStyle/>
-          <a:p>
-            <a:pPr algn="ctr">
-              <a:defRPr sz="1800" b="1">
-                <a:solidFill>
-                  <a:srgbClr val="1E3C72"/>
-                </a:solidFill>
-              </a:defRPr>
-            </a:pPr>
-            <a:r>
-              <a:t>2. 思无邪</a:t>
-            </a:r>
-          </a:p>
-          <a:p>
-            <a:pPr>
-              <a:defRPr sz="1500">
-                <a:solidFill>
-                  <a:srgbClr val="333333"/>
-                </a:solidFill>
-              </a:defRPr>
-            </a:pPr>
-            <a:r>
-              <a:t>真正美好的诗歌，能净化人的心灵，让人思想纯正、情感真挚。</a:t>
-            </a:r>
-          </a:p>
-        </p:txBody>
-      </p:sp>
-      <p:sp>
-        <p:nvSpPr>
-          <p:cNvPr id="6" name="Rounded Rectangle 5"/>
-          <p:cNvSpPr/>
-          <p:nvPr/>
-        </p:nvSpPr>
-        <p:spPr>
-          <a:xfrm>
-            <a:off x="457200" y="3931920"/>
-            <a:ext cx="8229600" cy="1188720"/>
-          </a:xfrm>
-          <a:prstGeom prst="roundRect">
-            <a:avLst/>
-          </a:prstGeom>
-          <a:solidFill>
-            <a:srgbClr val="F5F5F0"/>
-          </a:solidFill>
-        </p:spPr>
-        <p:style>
-          <a:lnRef idx="1">
-            <a:schemeClr val="accent1"/>
-          </a:lnRef>
-          <a:fillRef idx="3">
-            <a:schemeClr val="accent1"/>
-          </a:fillRef>
-          <a:effectRef idx="2">
-            <a:schemeClr val="accent1"/>
-          </a:effectRef>
-          <a:fontRef idx="minor">
-            <a:schemeClr val="lt1"/>
-          </a:fontRef>
-        </p:style>
-        <p:txBody>
-          <a:bodyPr rtlCol="0" anchor="ctr" wrap="square"/>
-          <a:lstStyle/>
-          <a:p>
-            <a:pPr algn="ctr">
-              <a:defRPr sz="1800" b="1">
-                <a:solidFill>
-                  <a:srgbClr val="1E3C72"/>
-                </a:solidFill>
-              </a:defRPr>
-            </a:pPr>
-            <a:r>
-              <a:t>3. 师道尊严</a:t>
-            </a:r>
-          </a:p>
-          <a:p>
-            <a:pPr>
-              <a:defRPr sz="1500">
-                <a:solidFill>
-                  <a:srgbClr val="333333"/>
-                </a:solidFill>
-              </a:defRPr>
-            </a:pPr>
-            <a:r>
-              <a:t>能'温故知新'的人才配当老师——老师不是知识的唯一来源，而是引导你发现的人。</a:t>
-            </a:r>
-          </a:p>
-        </p:txBody>
-      </p:sp>
-      <p:sp>
-        <p:nvSpPr>
-          <p:cNvPr id="7" name="TextBox 6"/>
-          <p:cNvSpPr txBox="1"/>
-          <p:nvPr/>
-        </p:nvSpPr>
-        <p:spPr>
-          <a:xfrm>
-            <a:off x="8229600" y="6583680"/>
-            <a:ext cx="731520" cy="274320"/>
-          </a:xfrm>
-          <a:prstGeom prst="rect">
-            <a:avLst/>
-          </a:prstGeom>
-          <a:noFill/>
-        </p:spPr>
-        <p:txBody>
-          <a:bodyPr wrap="none">
-            <a:spAutoFit/>
-          </a:bodyPr>
-          <a:lstStyle/>
-          <a:p>
-            <a:pPr algn="r">
-              <a:defRPr sz="1200">
-                <a:solidFill>
-                  <a:srgbClr val="969696"/>
-                </a:solidFill>
-              </a:defRPr>
-            </a:pPr>
-            <a:r>
-              <a:t>12/14</a:t>
-            </a:r>
-          </a:p>
-        </p:txBody>
-      </p:sp>
-    </p:spTree>
-  </p:cSld>
-  <p:clrMapOvr>
-    <a:masterClrMapping/>
-  </p:clrMapOvr>
-</p:sld>
-</file>
-
-<file path=ppt/slides/slide13.xml><?xml version="1.0" encoding="utf-8"?>
-<p:sld xmlns:a="http://schemas.openxmlformats.org/drawingml/2006/main" xmlns:p="http://schemas.openxmlformats.org/presentationml/2006/main" xmlns:r="http://schemas.openxmlformats.org/officeDocument/2006/relationships">
-  <p:cSld>
-    <p:spTree>
-      <p:nvGrpSpPr>
-        <p:cNvPr id="1" name=""/>
-        <p:cNvGrpSpPr/>
-        <p:nvPr/>
-      </p:nvGrpSpPr>
-      <p:grpSpPr/>
-      <p:sp>
-        <p:nvSpPr>
-          <p:cNvPr id="2" name="Rectangle 1"/>
-          <p:cNvSpPr/>
-          <p:nvPr/>
-        </p:nvSpPr>
-        <p:spPr>
-          <a:xfrm>
-            <a:off x="0" y="0"/>
-            <a:ext cx="9144000" cy="1188720"/>
-          </a:xfrm>
-          <a:prstGeom prst="rect">
-            <a:avLst/>
-          </a:prstGeom>
-          <a:solidFill>
-            <a:srgbClr val="1E3C72"/>
-          </a:solidFill>
-          <a:ln>
-            <a:noFill/>
-          </a:ln>
-        </p:spPr>
-        <p:style>
-          <a:lnRef idx="1">
-            <a:schemeClr val="accent1"/>
-          </a:lnRef>
-          <a:fillRef idx="3">
-            <a:schemeClr val="accent1"/>
-          </a:fillRef>
-          <a:effectRef idx="2">
-            <a:schemeClr val="accent1"/>
-          </a:effectRef>
-          <a:fontRef idx="minor">
-            <a:schemeClr val="lt1"/>
-          </a:fontRef>
-        </p:style>
-        <p:txBody>
-          <a:bodyPr rtlCol="0" anchor="ctr"/>
-          <a:lstStyle/>
-          <a:p>
-            <a:pPr algn="ctr"/>
-          </a:p>
-        </p:txBody>
-      </p:sp>
-      <p:sp>
-        <p:nvSpPr>
-          <p:cNvPr id="3" name="TextBox 2"/>
-          <p:cNvSpPr txBox="1"/>
-          <p:nvPr/>
-        </p:nvSpPr>
-        <p:spPr>
-          <a:xfrm>
-            <a:off x="457200" y="228600"/>
-            <a:ext cx="8229600" cy="731520"/>
-          </a:xfrm>
-          <a:prstGeom prst="rect">
-            <a:avLst/>
-          </a:prstGeom>
-          <a:noFill/>
-        </p:spPr>
-        <p:txBody>
-          <a:bodyPr wrap="none">
-            <a:spAutoFit/>
-          </a:bodyPr>
-          <a:lstStyle/>
-          <a:p>
-            <a:pPr>
-              <a:defRPr sz="3400" b="1">
-                <a:solidFill>
-                  <a:srgbClr val="FFFFFF"/>
-                </a:solidFill>
-              </a:defRPr>
-            </a:pPr>
-            <a:r>
-              <a:t>Historical Background</a:t>
-            </a:r>
-          </a:p>
-        </p:txBody>
-      </p:sp>
-      <p:sp>
-        <p:nvSpPr>
-          <p:cNvPr id="4" name="Rounded Rectangle 3"/>
-          <p:cNvSpPr/>
-          <p:nvPr/>
-        </p:nvSpPr>
-        <p:spPr>
-          <a:xfrm>
-            <a:off x="457200" y="1371600"/>
-            <a:ext cx="8229600" cy="2286000"/>
-          </a:xfrm>
-          <a:prstGeom prst="roundRect">
-            <a:avLst/>
-          </a:prstGeom>
-          <a:solidFill>
-            <a:srgbClr val="F5F5F0"/>
-          </a:solidFill>
-        </p:spPr>
-        <p:style>
-          <a:lnRef idx="1">
-            <a:schemeClr val="accent1"/>
-          </a:lnRef>
-          <a:fillRef idx="3">
-            <a:schemeClr val="accent1"/>
-          </a:fillRef>
-          <a:effectRef idx="2">
-            <a:schemeClr val="accent1"/>
-          </a:effectRef>
-          <a:fontRef idx="minor">
-            <a:schemeClr val="lt1"/>
-          </a:fontRef>
-        </p:style>
-        <p:txBody>
-          <a:bodyPr rtlCol="0" anchor="ctr" wrap="square"/>
-          <a:lstStyle/>
-          <a:p>
-            <a:pPr algn="ctr">
-              <a:defRPr sz="1800" b="1">
-                <a:solidFill>
-                  <a:srgbClr val="1E3C72"/>
-                </a:solidFill>
-              </a:defRPr>
-            </a:pPr>
-            <a:r>
-              <a:t>Wei Zheng Yi De (为政以德) - Background</a:t>
-            </a:r>
-          </a:p>
-          <a:p>
-            <a:pPr>
-              <a:spcBef>
-                <a:spcPts val="800"/>
-              </a:spcBef>
-              <a:defRPr sz="1500">
-                <a:solidFill>
-                  <a:srgbClr val="333333"/>
-                </a:solidFill>
-              </a:defRPr>
-            </a:pPr>
-            <a:r>
-              <a:t>This is Confucius's famous 'Rule by Virtue' thought. During the Spring and Autumn period, many rulers relied on harsh laws. Confucius advocated governing by virtue, believing moral influence was more effective than legal coercion. The Han Dynasty adopted Confucian Rule by Virtue 200 years later, creating a 400-year golden age.</a:t>
-            </a:r>
-          </a:p>
-        </p:txBody>
-      </p:sp>
-      <p:sp>
-        <p:nvSpPr>
-          <p:cNvPr id="5" name="TextBox 4"/>
-          <p:cNvSpPr txBox="1"/>
-          <p:nvPr/>
-        </p:nvSpPr>
-        <p:spPr>
-          <a:xfrm>
-            <a:off x="8229600" y="6583680"/>
-            <a:ext cx="731520" cy="274320"/>
-          </a:xfrm>
-          <a:prstGeom prst="rect">
-            <a:avLst/>
-          </a:prstGeom>
-          <a:noFill/>
-        </p:spPr>
-        <p:txBody>
-          <a:bodyPr wrap="none">
-            <a:spAutoFit/>
-          </a:bodyPr>
-          <a:lstStyle/>
-          <a:p>
-            <a:pPr algn="r">
-              <a:defRPr sz="1200">
-                <a:solidFill>
-                  <a:srgbClr val="969696"/>
-                </a:solidFill>
-              </a:defRPr>
-            </a:pPr>
-            <a:r>
-              <a:t>13/14</a:t>
-            </a:r>
-          </a:p>
-        </p:txBody>
-      </p:sp>
-    </p:spTree>
-  </p:cSld>
-  <p:clrMapOvr>
-    <a:masterClrMapping/>
-  </p:clrMapOvr>
-</p:sld>
-</file>
-
-<file path=ppt/slides/slide14.xml><?xml version="1.0" encoding="utf-8"?>
-<p:sld xmlns:a="http://schemas.openxmlformats.org/drawingml/2006/main" xmlns:p="http://schemas.openxmlformats.org/presentationml/2006/main" xmlns:r="http://schemas.openxmlformats.org/officeDocument/2006/relationships">
-  <p:cSld>
-    <p:spTree>
-      <p:nvGrpSpPr>
-        <p:cNvPr id="1" name=""/>
-        <p:cNvGrpSpPr/>
-        <p:nvPr/>
-      </p:nvGrpSpPr>
-      <p:grpSpPr/>
-      <p:sp>
-        <p:nvSpPr>
-          <p:cNvPr id="2" name="Rectangle 1"/>
-          <p:cNvSpPr/>
-          <p:nvPr/>
-        </p:nvSpPr>
-        <p:spPr>
-          <a:xfrm>
-            <a:off x="0" y="0"/>
-            <a:ext cx="9144000" cy="1188720"/>
-          </a:xfrm>
-          <a:prstGeom prst="rect">
-            <a:avLst/>
-          </a:prstGeom>
-          <a:solidFill>
-            <a:srgbClr val="1E3C72"/>
-          </a:solidFill>
-          <a:ln>
-            <a:noFill/>
-          </a:ln>
-        </p:spPr>
-        <p:style>
-          <a:lnRef idx="1">
-            <a:schemeClr val="accent1"/>
-          </a:lnRef>
-          <a:fillRef idx="3">
-            <a:schemeClr val="accent1"/>
-          </a:fillRef>
-          <a:effectRef idx="2">
-            <a:schemeClr val="accent1"/>
-          </a:effectRef>
-          <a:fontRef idx="minor">
-            <a:schemeClr val="lt1"/>
-          </a:fontRef>
-        </p:style>
-        <p:txBody>
-          <a:bodyPr rtlCol="0" anchor="ctr"/>
-          <a:lstStyle/>
-          <a:p>
-            <a:pPr algn="ctr"/>
-          </a:p>
-        </p:txBody>
-      </p:sp>
-      <p:sp>
-        <p:nvSpPr>
-          <p:cNvPr id="3" name="TextBox 2"/>
-          <p:cNvSpPr txBox="1"/>
-          <p:nvPr/>
-        </p:nvSpPr>
-        <p:spPr>
-          <a:xfrm>
-            <a:off x="457200" y="228600"/>
-            <a:ext cx="8229600" cy="731520"/>
-          </a:xfrm>
-          <a:prstGeom prst="rect">
-            <a:avLst/>
-          </a:prstGeom>
-          <a:noFill/>
-        </p:spPr>
-        <p:txBody>
-          <a:bodyPr wrap="none">
-            <a:spAutoFit/>
-          </a:bodyPr>
-          <a:lstStyle/>
-          <a:p>
-            <a:pPr>
-              <a:defRPr sz="3400" b="1">
-                <a:solidFill>
-                  <a:srgbClr val="FFFFFF"/>
-                </a:solidFill>
-              </a:defRPr>
-            </a:pPr>
-            <a:r>
-              <a:t>Day 2 - Summary</a:t>
-            </a:r>
-          </a:p>
-        </p:txBody>
-      </p:sp>
-      <p:sp>
-        <p:nvSpPr>
-          <p:cNvPr id="4" name="Rounded Rectangle 3"/>
-          <p:cNvSpPr/>
-          <p:nvPr/>
-        </p:nvSpPr>
-        <p:spPr>
-          <a:xfrm>
-            <a:off x="457200" y="1371600"/>
-            <a:ext cx="8229600" cy="1280160"/>
-          </a:xfrm>
-          <a:prstGeom prst="roundRect">
-            <a:avLst/>
-          </a:prstGeom>
-          <a:solidFill>
-            <a:srgbClr val="F5F5F0"/>
-          </a:solidFill>
-        </p:spPr>
-        <p:style>
-          <a:lnRef idx="1">
-            <a:schemeClr val="accent1"/>
-          </a:lnRef>
-          <a:fillRef idx="3">
-            <a:schemeClr val="accent1"/>
-          </a:fillRef>
-          <a:effectRef idx="2">
-            <a:schemeClr val="accent1"/>
-          </a:effectRef>
-          <a:fontRef idx="minor">
-            <a:schemeClr val="lt1"/>
-          </a:fontRef>
-        </p:style>
-        <p:txBody>
-          <a:bodyPr rtlCol="0" anchor="ctr" wrap="square"/>
-          <a:lstStyle/>
-          <a:p>
-            <a:pPr algn="ctr">
-              <a:defRPr sz="1800" b="1">
-                <a:solidFill>
-                  <a:srgbClr val="1E3C72"/>
-                </a:solidFill>
-              </a:defRPr>
-            </a:pPr>
-            <a:r>
-              <a:t>Chapter 4: Wei Zheng Yi De (为政以德)</a:t>
-            </a:r>
-          </a:p>
-          <a:p>
-            <a:pPr>
-              <a:defRPr sz="1400">
-                <a:solidFill>
-                  <a:srgbClr val="333333"/>
-                </a:solidFill>
-              </a:defRPr>
-            </a:pPr>
-            <a:r>
-              <a:t>用道德而非刑罚来治理国家——领导者的德行感化民众，比强制更有效。</a:t>
-            </a:r>
-          </a:p>
-        </p:txBody>
-      </p:sp>
-      <p:sp>
-        <p:nvSpPr>
-          <p:cNvPr id="5" name="Rounded Rectangle 4"/>
-          <p:cNvSpPr/>
-          <p:nvPr/>
-        </p:nvSpPr>
-        <p:spPr>
-          <a:xfrm>
-            <a:off x="457200" y="2743200"/>
-            <a:ext cx="8229600" cy="1280160"/>
-          </a:xfrm>
-          <a:prstGeom prst="roundRect">
-            <a:avLst/>
-          </a:prstGeom>
-          <a:solidFill>
-            <a:srgbClr val="F5F5F0"/>
-          </a:solidFill>
-        </p:spPr>
-        <p:style>
-          <a:lnRef idx="1">
-            <a:schemeClr val="accent1"/>
-          </a:lnRef>
-          <a:fillRef idx="3">
-            <a:schemeClr val="accent1"/>
-          </a:fillRef>
-          <a:effectRef idx="2">
-            <a:schemeClr val="accent1"/>
-          </a:effectRef>
-          <a:fontRef idx="minor">
-            <a:schemeClr val="lt1"/>
-          </a:fontRef>
-        </p:style>
-        <p:txBody>
-          <a:bodyPr rtlCol="0" anchor="ctr" wrap="square"/>
-          <a:lstStyle/>
-          <a:p>
-            <a:pPr algn="ctr">
-              <a:defRPr sz="1800" b="1">
-                <a:solidFill>
-                  <a:srgbClr val="1E3C72"/>
-                </a:solidFill>
-              </a:defRPr>
-            </a:pPr>
-            <a:r>
-              <a:t>Chapter 5: Si Wu Xie (思无邪)</a:t>
-            </a:r>
-          </a:p>
-          <a:p>
-            <a:pPr>
-              <a:defRPr sz="1400">
-                <a:solidFill>
-                  <a:srgbClr val="333333"/>
-                </a:solidFill>
-              </a:defRPr>
-            </a:pPr>
-            <a:r>
-              <a:t>《诗经》能让人思想纯正——文学有教化人心的力量。</a:t>
-            </a:r>
-          </a:p>
-        </p:txBody>
-      </p:sp>
-      <p:sp>
-        <p:nvSpPr>
-          <p:cNvPr id="6" name="Rounded Rectangle 5"/>
-          <p:cNvSpPr/>
-          <p:nvPr/>
-        </p:nvSpPr>
-        <p:spPr>
-          <a:xfrm>
-            <a:off x="457200" y="4114800"/>
-            <a:ext cx="8229600" cy="1280160"/>
-          </a:xfrm>
-          <a:prstGeom prst="roundRect">
-            <a:avLst/>
-          </a:prstGeom>
-          <a:solidFill>
-            <a:srgbClr val="F5F5F0"/>
-          </a:solidFill>
-        </p:spPr>
-        <p:style>
-          <a:lnRef idx="1">
-            <a:schemeClr val="accent1"/>
-          </a:lnRef>
-          <a:fillRef idx="3">
-            <a:schemeClr val="accent1"/>
-          </a:fillRef>
-          <a:effectRef idx="2">
-            <a:schemeClr val="accent1"/>
-          </a:effectRef>
-          <a:fontRef idx="minor">
-            <a:schemeClr val="lt1"/>
-          </a:fontRef>
-        </p:style>
-        <p:txBody>
-          <a:bodyPr rtlCol="0" anchor="ctr" wrap="square"/>
-          <a:lstStyle/>
-          <a:p>
-            <a:pPr algn="ctr">
-              <a:defRPr sz="1800" b="1">
-                <a:solidFill>
-                  <a:srgbClr val="1E3C72"/>
-                </a:solidFill>
-              </a:defRPr>
-            </a:pPr>
-            <a:r>
-              <a:t>Chapter 6: Wen Gu Zhi Xin (温故知新)</a:t>
-            </a:r>
-          </a:p>
-          <a:p>
-            <a:pPr>
-              <a:defRPr sz="1400">
-                <a:solidFill>
-                  <a:srgbClr val="333333"/>
-                </a:solidFill>
-              </a:defRPr>
-            </a:pPr>
-            <a:r>
-              <a:t>学习首先要打好基础，反复温习是学习的必经之路——没有白学的知识。</a:t>
-            </a:r>
-          </a:p>
-        </p:txBody>
-      </p:sp>
-      <p:sp>
-        <p:nvSpPr>
-          <p:cNvPr id="7" name="Rounded Rectangle 6"/>
-          <p:cNvSpPr/>
-          <p:nvPr/>
-        </p:nvSpPr>
-        <p:spPr>
-          <a:xfrm>
-            <a:off x="457200" y="5577840"/>
-            <a:ext cx="8229600" cy="914400"/>
-          </a:xfrm>
-          <a:prstGeom prst="roundRect">
-            <a:avLst/>
-          </a:prstGeom>
-          <a:solidFill>
-            <a:srgbClr val="1E3C72"/>
-          </a:solidFill>
-        </p:spPr>
-        <p:style>
-          <a:lnRef idx="1">
-            <a:schemeClr val="accent1"/>
-          </a:lnRef>
-          <a:fillRef idx="3">
-            <a:schemeClr val="accent1"/>
-          </a:fillRef>
-          <a:effectRef idx="2">
-            <a:schemeClr val="accent1"/>
-          </a:effectRef>
-          <a:fontRef idx="minor">
-            <a:schemeClr val="lt1"/>
-          </a:fontRef>
-        </p:style>
-        <p:txBody>
-          <a:bodyPr rtlCol="0" anchor="ctr" wrap="square"/>
-          <a:lstStyle/>
-          <a:p>
-            <a:pPr algn="ctr">
-              <a:defRPr sz="2200" b="1">
-                <a:solidFill>
-                  <a:srgbClr val="FFFFFF"/>
-                </a:solidFill>
-              </a:defRPr>
-            </a:pPr>
-            <a:r>
-              <a:t>Zi Yue: 'Wei Zheng Yi De,</a:t>
-            </a:r>
-          </a:p>
-        </p:txBody>
-      </p:sp>
-      <p:sp>
-        <p:nvSpPr>
-          <p:cNvPr id="8" name="TextBox 7"/>
-          <p:cNvSpPr txBox="1"/>
-          <p:nvPr/>
-        </p:nvSpPr>
-        <p:spPr>
-          <a:xfrm>
-            <a:off x="8229600" y="6583680"/>
-            <a:ext cx="731520" cy="274320"/>
-          </a:xfrm>
-          <a:prstGeom prst="rect">
-            <a:avLst/>
-          </a:prstGeom>
-          <a:noFill/>
-        </p:spPr>
-        <p:txBody>
-          <a:bodyPr wrap="none">
-            <a:spAutoFit/>
-          </a:bodyPr>
-          <a:lstStyle/>
-          <a:p>
-            <a:pPr algn="r">
-              <a:defRPr sz="1200">
-                <a:solidFill>
-                  <a:srgbClr val="969696"/>
-                </a:solidFill>
-              </a:defRPr>
-            </a:pPr>
-            <a:r>
-              <a:t>14/14</a:t>
-            </a:r>
-          </a:p>
-        </p:txBody>
-      </p:sp>
-    </p:spTree>
-  </p:cSld>
-  <p:clrMapOvr>
-    <a:masterClrMapping/>
-  </p:clrMapOvr>
-</p:sld>
-</file>
-
-<file path=ppt/slides/slide2.xml><?xml version="1.0" encoding="utf-8"?>
-<p:sld xmlns:a="http://schemas.openxmlformats.org/drawingml/2006/main" xmlns:p="http://schemas.openxmlformats.org/presentationml/2006/main" xmlns:r="http://schemas.openxmlformats.org/officeDocument/2006/relationships">
-  <p:cSld>
-    <p:spTree>
-      <p:nvGrpSpPr>
-        <p:cNvPr id="1" name=""/>
-        <p:cNvGrpSpPr/>
-        <p:nvPr/>
-      </p:nvGrpSpPr>
-      <p:grpSpPr/>
-      <p:sp>
-        <p:nvSpPr>
-          <p:cNvPr id="2" name="Rectangle 1"/>
-          <p:cNvSpPr/>
-          <p:nvPr/>
-        </p:nvSpPr>
-        <p:spPr>
-          <a:xfrm>
-            <a:off x="0" y="0"/>
-            <a:ext cx="9144000" cy="1188720"/>
-          </a:xfrm>
-          <a:prstGeom prst="rect">
-            <a:avLst/>
-          </a:prstGeom>
-          <a:solidFill>
-            <a:srgbClr val="1E3C72"/>
-          </a:solidFill>
-          <a:ln>
-            <a:noFill/>
-          </a:ln>
-        </p:spPr>
-        <p:style>
-          <a:lnRef idx="1">
-            <a:schemeClr val="accent1"/>
-          </a:lnRef>
-          <a:fillRef idx="3">
-            <a:schemeClr val="accent1"/>
-          </a:fillRef>
-          <a:effectRef idx="2">
-            <a:schemeClr val="accent1"/>
-          </a:effectRef>
-          <a:fontRef idx="minor">
-            <a:schemeClr val="lt1"/>
-          </a:fontRef>
-        </p:style>
-        <p:txBody>
-          <a:bodyPr rtlCol="0" anchor="ctr"/>
-          <a:lstStyle/>
-          <a:p>
-            <a:pPr algn="ctr"/>
-          </a:p>
-        </p:txBody>
-      </p:sp>
-      <p:sp>
-        <p:nvSpPr>
-          <p:cNvPr id="3" name="TextBox 2"/>
-          <p:cNvSpPr txBox="1"/>
-          <p:nvPr/>
-        </p:nvSpPr>
-        <p:spPr>
-          <a:xfrm>
-            <a:off x="457200" y="228600"/>
-            <a:ext cx="8229600" cy="731520"/>
-          </a:xfrm>
-          <a:prstGeom prst="rect">
-            <a:avLst/>
-          </a:prstGeom>
-          <a:noFill/>
-        </p:spPr>
-        <p:txBody>
-          <a:bodyPr wrap="none">
-            <a:spAutoFit/>
-          </a:bodyPr>
-          <a:lstStyle/>
-          <a:p>
-            <a:pPr>
-              <a:defRPr sz="3400" b="1">
-                <a:solidFill>
-                  <a:srgbClr val="FFFFFF"/>
-                </a:solidFill>
-              </a:defRPr>
-            </a:pPr>
-            <a:r>
-              <a:t>Chapter 4 - Wei Zheng Yi De (为政以德)</a:t>
-            </a:r>
-          </a:p>
-        </p:txBody>
-      </p:sp>
-      <p:sp>
-        <p:nvSpPr>
-          <p:cNvPr id="4" name="Rounded Rectangle 3"/>
-          <p:cNvSpPr/>
-          <p:nvPr/>
-        </p:nvSpPr>
-        <p:spPr>
-          <a:xfrm>
-            <a:off x="457200" y="1371600"/>
-            <a:ext cx="8229600" cy="3474720"/>
-          </a:xfrm>
-          <a:prstGeom prst="roundRect">
-            <a:avLst/>
-          </a:prstGeom>
-          <a:solidFill>
-            <a:srgbClr val="F5F5F0"/>
-          </a:solidFill>
-        </p:spPr>
-        <p:style>
-          <a:lnRef idx="1">
-            <a:schemeClr val="accent1"/>
-          </a:lnRef>
-          <a:fillRef idx="3">
-            <a:schemeClr val="accent1"/>
-          </a:fillRef>
-          <a:effectRef idx="2">
-            <a:schemeClr val="accent1"/>
-          </a:effectRef>
-          <a:fontRef idx="minor">
-            <a:schemeClr val="lt1"/>
-          </a:fontRef>
-        </p:style>
-        <p:txBody>
-          <a:bodyPr rtlCol="0" anchor="ctr" wrap="square"/>
-          <a:lstStyle/>
-          <a:p>
-            <a:pPr algn="ctr">
-              <a:defRPr sz="1800" b="1">
-                <a:solidFill>
-                  <a:srgbClr val="1E3C72"/>
-                </a:solidFill>
-              </a:defRPr>
-            </a:pPr>
-            <a:r>
-              <a:t>[Original Text]</a:t>
-            </a:r>
-          </a:p>
-          <a:p>
-            <a:pPr>
-              <a:spcBef>
-                <a:spcPts val="400"/>
-              </a:spcBef>
-              <a:defRPr sz="2200">
-                <a:solidFill>
-                  <a:srgbClr val="333333"/>
-                </a:solidFill>
-              </a:defRPr>
-            </a:pPr>
-            <a:r>
-              <a:t>Zi Yue: 'Wei Zheng Yi De,</a:t>
-            </a:r>
-          </a:p>
-          <a:p>
-            <a:pPr>
-              <a:spcBef>
-                <a:spcPts val="400"/>
-              </a:spcBef>
-              <a:defRPr sz="2200">
-                <a:solidFill>
-                  <a:srgbClr val="333333"/>
-                </a:solidFill>
-              </a:defRPr>
-            </a:pPr>
-            <a:r>
-              <a:t>Pi Ru Bei Chen, Ju Qi Suo Er Zhong Xing Gong Zhi.'</a:t>
-            </a:r>
-          </a:p>
-        </p:txBody>
-      </p:sp>
-      <p:sp>
-        <p:nvSpPr>
-          <p:cNvPr id="5" name="Rounded Rectangle 4"/>
-          <p:cNvSpPr/>
-          <p:nvPr/>
-        </p:nvSpPr>
-        <p:spPr>
-          <a:xfrm>
-            <a:off x="457200" y="4937760"/>
-            <a:ext cx="8229600" cy="1005840"/>
-          </a:xfrm>
-          <a:prstGeom prst="roundRect">
-            <a:avLst/>
-          </a:prstGeom>
-          <a:solidFill>
-            <a:srgbClr val="4682B4"/>
-          </a:solidFill>
-        </p:spPr>
-        <p:style>
-          <a:lnRef idx="1">
-            <a:schemeClr val="accent1"/>
-          </a:lnRef>
-          <a:fillRef idx="3">
-            <a:schemeClr val="accent1"/>
-          </a:fillRef>
-          <a:effectRef idx="2">
-            <a:schemeClr val="accent1"/>
-          </a:effectRef>
-          <a:fontRef idx="minor">
-            <a:schemeClr val="lt1"/>
-          </a:fontRef>
-        </p:style>
-        <p:txBody>
-          <a:bodyPr rtlCol="0" anchor="ctr" wrap="square"/>
-          <a:lstStyle/>
-          <a:p>
-            <a:pPr algn="ctr">
-              <a:defRPr sz="1600">
-                <a:solidFill>
-                  <a:srgbClr val="FFFFFF"/>
-                </a:solidFill>
-              </a:defRPr>
-            </a:pPr>
-            <a:r>
-              <a:t>[Translation] 孔子说：用道德来治理国家，就像北极星一样，处在自己的位置上，而众星都环绕着它。</a:t>
-            </a:r>
-          </a:p>
-          <a:p>
-            <a:pPr>
-              <a:defRPr sz="1500" i="1">
-                <a:solidFill>
-                  <a:srgbClr val="DCDCFF"/>
-                </a:solidFill>
-              </a:defRPr>
-            </a:pPr>
-            <a:r>
-              <a:t>[EN] Confucius said: 'Govern with virtue, and the people will be like the stars revolving around the North Star - each in its proper place.'</a:t>
-            </a:r>
-          </a:p>
-        </p:txBody>
-      </p:sp>
-      <p:sp>
-        <p:nvSpPr>
-          <p:cNvPr id="6" name="TextBox 5"/>
-          <p:cNvSpPr txBox="1"/>
-          <p:nvPr/>
-        </p:nvSpPr>
-        <p:spPr>
-          <a:xfrm>
-            <a:off x="8229600" y="6583680"/>
-            <a:ext cx="731520" cy="274320"/>
-          </a:xfrm>
-          <a:prstGeom prst="rect">
-            <a:avLst/>
-          </a:prstGeom>
-          <a:noFill/>
-        </p:spPr>
-        <p:txBody>
-          <a:bodyPr wrap="none">
-            <a:spAutoFit/>
-          </a:bodyPr>
-          <a:lstStyle/>
-          <a:p>
-            <a:pPr algn="r">
-              <a:defRPr sz="1200">
-                <a:solidFill>
-                  <a:srgbClr val="969696"/>
-                </a:solidFill>
-              </a:defRPr>
-            </a:pPr>
-            <a:r>
               <a:t>2/14</a:t>
-            </a:r>
-          </a:p>
-        </p:txBody>
-      </p:sp>
-    </p:spTree>
-  </p:cSld>
-  <p:clrMapOvr>
-    <a:masterClrMapping/>
-  </p:clrMapOvr>
-</p:sld>
-</file>
-
-<file path=ppt/slides/slide3.xml><?xml version="1.0" encoding="utf-8"?>
-<p:sld xmlns:a="http://schemas.openxmlformats.org/drawingml/2006/main" xmlns:p="http://schemas.openxmlformats.org/presentationml/2006/main" xmlns:r="http://schemas.openxmlformats.org/officeDocument/2006/relationships">
-  <p:cSld>
-    <p:spTree>
-      <p:nvGrpSpPr>
-        <p:cNvPr id="1" name=""/>
-        <p:cNvGrpSpPr/>
-        <p:nvPr/>
-      </p:nvGrpSpPr>
-      <p:grpSpPr/>
-      <p:sp>
-        <p:nvSpPr>
-          <p:cNvPr id="2" name="Rectangle 1"/>
-          <p:cNvSpPr/>
-          <p:nvPr/>
-        </p:nvSpPr>
-        <p:spPr>
-          <a:xfrm>
-            <a:off x="0" y="0"/>
-            <a:ext cx="9144000" cy="1188720"/>
-          </a:xfrm>
-          <a:prstGeom prst="rect">
-            <a:avLst/>
-          </a:prstGeom>
-          <a:solidFill>
-            <a:srgbClr val="1E3C72"/>
-          </a:solidFill>
-          <a:ln>
-            <a:noFill/>
-          </a:ln>
-        </p:spPr>
-        <p:style>
-          <a:lnRef idx="1">
-            <a:schemeClr val="accent1"/>
-          </a:lnRef>
-          <a:fillRef idx="3">
-            <a:schemeClr val="accent1"/>
-          </a:fillRef>
-          <a:effectRef idx="2">
-            <a:schemeClr val="accent1"/>
-          </a:effectRef>
-          <a:fontRef idx="minor">
-            <a:schemeClr val="lt1"/>
-          </a:fontRef>
-        </p:style>
-        <p:txBody>
-          <a:bodyPr rtlCol="0" anchor="ctr"/>
-          <a:lstStyle/>
-          <a:p>
-            <a:pPr algn="ctr"/>
-          </a:p>
-        </p:txBody>
-      </p:sp>
-      <p:sp>
-        <p:nvSpPr>
-          <p:cNvPr id="3" name="TextBox 2"/>
-          <p:cNvSpPr txBox="1"/>
-          <p:nvPr/>
-        </p:nvSpPr>
-        <p:spPr>
-          <a:xfrm>
-            <a:off x="457200" y="228600"/>
-            <a:ext cx="8229600" cy="731520"/>
-          </a:xfrm>
-          <a:prstGeom prst="rect">
-            <a:avLst/>
-          </a:prstGeom>
-          <a:noFill/>
-        </p:spPr>
-        <p:txBody>
-          <a:bodyPr wrap="none">
-            <a:spAutoFit/>
-          </a:bodyPr>
-          <a:lstStyle/>
-          <a:p>
-            <a:pPr>
-              <a:defRPr sz="3400" b="1">
-                <a:solidFill>
-                  <a:srgbClr val="FFFFFF"/>
-                </a:solidFill>
-              </a:defRPr>
-            </a:pPr>
-            <a:r>
-              <a:t>Chapter 4 - Wei Zheng Yi De (为政以德) [Annotations]</a:t>
-            </a:r>
-          </a:p>
-        </p:txBody>
-      </p:sp>
-      <p:sp>
-        <p:nvSpPr>
-          <p:cNvPr id="4" name="Rounded Rectangle 3"/>
-          <p:cNvSpPr/>
-          <p:nvPr/>
-        </p:nvSpPr>
-        <p:spPr>
-          <a:xfrm>
-            <a:off x="457200" y="1371600"/>
-            <a:ext cx="8229600" cy="3840480"/>
-          </a:xfrm>
-          <a:prstGeom prst="roundRect">
-            <a:avLst/>
-          </a:prstGeom>
-          <a:solidFill>
-            <a:srgbClr val="F5F5F0"/>
-          </a:solidFill>
-        </p:spPr>
-        <p:style>
-          <a:lnRef idx="1">
-            <a:schemeClr val="accent1"/>
-          </a:lnRef>
-          <a:fillRef idx="3">
-            <a:schemeClr val="accent1"/>
-          </a:fillRef>
-          <a:effectRef idx="2">
-            <a:schemeClr val="accent1"/>
-          </a:effectRef>
-          <a:fontRef idx="minor">
-            <a:schemeClr val="lt1"/>
-          </a:fontRef>
-        </p:style>
-        <p:txBody>
-          <a:bodyPr rtlCol="0" anchor="ctr" wrap="square"/>
-          <a:lstStyle/>
-          <a:p>
-            <a:pPr algn="ctr">
-              <a:defRPr sz="1800" b="1">
-                <a:solidFill>
-                  <a:srgbClr val="1E3C72"/>
-                </a:solidFill>
-              </a:defRPr>
-            </a:pPr>
-            <a:r>
-              <a:t>[Annotations]</a:t>
-            </a:r>
-          </a:p>
-          <a:p>
-            <a:pPr>
-              <a:spcBef>
-                <a:spcPts val="500"/>
-              </a:spcBef>
-              <a:defRPr sz="1700">
-                <a:solidFill>
-                  <a:srgbClr val="333333"/>
-                </a:solidFill>
-              </a:defRPr>
-            </a:pPr>
-            <a:r>
-              <a:t>* Wei Zheng Yi De (为政以德): Govern with virtue</a:t>
-            </a:r>
-          </a:p>
-          <a:p>
-            <a:pPr>
-              <a:spcBef>
-                <a:spcPts val="500"/>
-              </a:spcBef>
-              <a:defRPr sz="1700">
-                <a:solidFill>
-                  <a:srgbClr val="333333"/>
-                </a:solidFill>
-              </a:defRPr>
-            </a:pPr>
-            <a:r>
-              <a:t>* Bei Chen (北辰): North Star</a:t>
-            </a:r>
-          </a:p>
-          <a:p>
-            <a:pPr>
-              <a:spcBef>
-                <a:spcPts val="500"/>
-              </a:spcBef>
-              <a:defRPr sz="1700">
-                <a:solidFill>
-                  <a:srgbClr val="333333"/>
-                </a:solidFill>
-              </a:defRPr>
-            </a:pPr>
-            <a:r>
-              <a:t>* Gong (共): Same as '拱' - surround</a:t>
-            </a:r>
-          </a:p>
-        </p:txBody>
-      </p:sp>
-      <p:sp>
-        <p:nvSpPr>
-          <p:cNvPr id="5" name="TextBox 4"/>
-          <p:cNvSpPr txBox="1"/>
-          <p:nvPr/>
-        </p:nvSpPr>
-        <p:spPr>
-          <a:xfrm>
-            <a:off x="8229600" y="6583680"/>
-            <a:ext cx="731520" cy="274320"/>
-          </a:xfrm>
-          <a:prstGeom prst="rect">
-            <a:avLst/>
-          </a:prstGeom>
-          <a:noFill/>
-        </p:spPr>
-        <p:txBody>
-          <a:bodyPr wrap="none">
-            <a:spAutoFit/>
-          </a:bodyPr>
-          <a:lstStyle/>
-          <a:p>
-            <a:pPr algn="r">
-              <a:defRPr sz="1200">
-                <a:solidFill>
-                  <a:srgbClr val="969696"/>
-                </a:solidFill>
-              </a:defRPr>
-            </a:pPr>
-            <a:r>
-              <a:t>3/14</a:t>
-            </a:r>
-          </a:p>
-        </p:txBody>
-      </p:sp>
-    </p:spTree>
-  </p:cSld>
-  <p:clrMapOvr>
-    <a:masterClrMapping/>
-  </p:clrMapOvr>
-</p:sld>
-</file>
-
-<file path=ppt/slides/slide4.xml><?xml version="1.0" encoding="utf-8"?>
-<p:sld xmlns:a="http://schemas.openxmlformats.org/drawingml/2006/main" xmlns:p="http://schemas.openxmlformats.org/presentationml/2006/main" xmlns:r="http://schemas.openxmlformats.org/officeDocument/2006/relationships">
-  <p:cSld>
-    <p:spTree>
-      <p:nvGrpSpPr>
-        <p:cNvPr id="1" name=""/>
-        <p:cNvGrpSpPr/>
-        <p:nvPr/>
-      </p:nvGrpSpPr>
-      <p:grpSpPr/>
-      <p:sp>
-        <p:nvSpPr>
-          <p:cNvPr id="2" name="Rectangle 1"/>
-          <p:cNvSpPr/>
-          <p:nvPr/>
-        </p:nvSpPr>
-        <p:spPr>
-          <a:xfrm>
-            <a:off x="0" y="0"/>
-            <a:ext cx="9144000" cy="1188720"/>
-          </a:xfrm>
-          <a:prstGeom prst="rect">
-            <a:avLst/>
-          </a:prstGeom>
-          <a:solidFill>
-            <a:srgbClr val="1E3C72"/>
-          </a:solidFill>
-          <a:ln>
-            <a:noFill/>
-          </a:ln>
-        </p:spPr>
-        <p:style>
-          <a:lnRef idx="1">
-            <a:schemeClr val="accent1"/>
-          </a:lnRef>
-          <a:fillRef idx="3">
-            <a:schemeClr val="accent1"/>
-          </a:fillRef>
-          <a:effectRef idx="2">
-            <a:schemeClr val="accent1"/>
-          </a:effectRef>
-          <a:fontRef idx="minor">
-            <a:schemeClr val="lt1"/>
-          </a:fontRef>
-        </p:style>
-        <p:txBody>
-          <a:bodyPr rtlCol="0" anchor="ctr"/>
-          <a:lstStyle/>
-          <a:p>
-            <a:pPr algn="ctr"/>
-          </a:p>
-        </p:txBody>
-      </p:sp>
-      <p:sp>
-        <p:nvSpPr>
-          <p:cNvPr id="3" name="TextBox 2"/>
-          <p:cNvSpPr txBox="1"/>
-          <p:nvPr/>
-        </p:nvSpPr>
-        <p:spPr>
-          <a:xfrm>
-            <a:off x="457200" y="228600"/>
-            <a:ext cx="8229600" cy="731520"/>
-          </a:xfrm>
-          <a:prstGeom prst="rect">
-            <a:avLst/>
-          </a:prstGeom>
-          <a:noFill/>
-        </p:spPr>
-        <p:txBody>
-          <a:bodyPr wrap="none">
-            <a:spAutoFit/>
-          </a:bodyPr>
-          <a:lstStyle/>
-          <a:p>
-            <a:pPr>
-              <a:defRPr sz="3400" b="1">
-                <a:solidFill>
-                  <a:srgbClr val="FFFFFF"/>
-                </a:solidFill>
-              </a:defRPr>
-            </a:pPr>
-            <a:r>
-              <a:t>Chapter 4 - Core Ideas</a:t>
-            </a:r>
-          </a:p>
-        </p:txBody>
-      </p:sp>
-      <p:sp>
-        <p:nvSpPr>
-          <p:cNvPr id="4" name="Rounded Rectangle 3"/>
-          <p:cNvSpPr/>
-          <p:nvPr/>
-        </p:nvSpPr>
-        <p:spPr>
-          <a:xfrm>
-            <a:off x="457200" y="1371600"/>
-            <a:ext cx="8229600" cy="1371600"/>
-          </a:xfrm>
-          <a:prstGeom prst="roundRect">
-            <a:avLst/>
-          </a:prstGeom>
-          <a:solidFill>
-            <a:srgbClr val="4682B4"/>
-          </a:solidFill>
-        </p:spPr>
-        <p:style>
-          <a:lnRef idx="1">
-            <a:schemeClr val="accent1"/>
-          </a:lnRef>
-          <a:fillRef idx="3">
-            <a:schemeClr val="accent1"/>
-          </a:fillRef>
-          <a:effectRef idx="2">
-            <a:schemeClr val="accent1"/>
-          </a:effectRef>
-          <a:fontRef idx="minor">
-            <a:schemeClr val="lt1"/>
-          </a:fontRef>
-        </p:style>
-        <p:txBody>
-          <a:bodyPr rtlCol="0" anchor="ctr" wrap="square"/>
-          <a:lstStyle/>
-          <a:p>
-            <a:pPr algn="ctr">
-              <a:defRPr sz="2000" b="1">
-                <a:solidFill>
-                  <a:srgbClr val="FFFFFF"/>
-                </a:solidFill>
-              </a:defRPr>
-            </a:pPr>
-            <a:r>
-              <a:t>Core Concept</a:t>
-            </a:r>
-          </a:p>
-          <a:p>
-            <a:pPr>
-              <a:defRPr sz="1700">
-                <a:solidFill>
-                  <a:srgbClr val="E6E6E6"/>
-                </a:solidFill>
-              </a:defRPr>
-            </a:pPr>
-            <a:r>
-              <a:t>为政以德: Modern management's 'Situational Leadership' and 'Servant Leadership' both...</a:t>
-            </a:r>
-          </a:p>
-        </p:txBody>
-      </p:sp>
-      <p:sp>
-        <p:nvSpPr>
-          <p:cNvPr id="5" name="TextBox 4"/>
-          <p:cNvSpPr txBox="1"/>
-          <p:nvPr/>
-        </p:nvSpPr>
-        <p:spPr>
-          <a:xfrm>
-            <a:off x="457200" y="2926080"/>
-            <a:ext cx="8229600" cy="1097280"/>
-          </a:xfrm>
-          <a:prstGeom prst="rect">
-            <a:avLst/>
-          </a:prstGeom>
-          <a:noFill/>
-        </p:spPr>
-        <p:txBody>
-          <a:bodyPr wrap="square">
-            <a:spAutoFit/>
-          </a:bodyPr>
-          <a:lstStyle/>
-          <a:p>
-            <a:pPr>
-              <a:defRPr sz="1900" b="1">
-                <a:solidFill>
-                  <a:srgbClr val="1E3C72"/>
-                </a:solidFill>
-              </a:defRPr>
-            </a:pPr>
-            <a:r>
-              <a:t>1. 为政以德</a:t>
-            </a:r>
-          </a:p>
-          <a:p>
-            <a:pPr>
-              <a:defRPr sz="1600">
-                <a:solidFill>
-                  <a:srgbClr val="333333"/>
-                </a:solidFill>
-              </a:defRPr>
-            </a:pPr>
-            <a:r>
-              <a:t>用道德而非刑罚来治理国家——领导者的德行感化民众，比强制更有效。</a:t>
-            </a:r>
-          </a:p>
-        </p:txBody>
-      </p:sp>
-      <p:sp>
-        <p:nvSpPr>
-          <p:cNvPr id="6" name="TextBox 5"/>
-          <p:cNvSpPr txBox="1"/>
-          <p:nvPr/>
-        </p:nvSpPr>
-        <p:spPr>
-          <a:xfrm>
-            <a:off x="457200" y="4023360"/>
-            <a:ext cx="8229600" cy="1097280"/>
-          </a:xfrm>
-          <a:prstGeom prst="rect">
-            <a:avLst/>
-          </a:prstGeom>
-          <a:noFill/>
-        </p:spPr>
-        <p:txBody>
-          <a:bodyPr wrap="square">
-            <a:spAutoFit/>
-          </a:bodyPr>
-          <a:lstStyle/>
-          <a:p>
-            <a:pPr>
-              <a:defRPr sz="1900" b="1">
-                <a:solidFill>
-                  <a:srgbClr val="1E3C72"/>
-                </a:solidFill>
-              </a:defRPr>
-            </a:pPr>
-            <a:r>
-              <a:t>2. 北辰比喻</a:t>
-            </a:r>
-          </a:p>
-          <a:p>
-            <a:pPr>
-              <a:defRPr sz="1600">
-                <a:solidFill>
-                  <a:srgbClr val="333333"/>
-                </a:solidFill>
-              </a:defRPr>
-            </a:pPr>
-            <a:r>
-              <a:t>有德的领导者像北极星，自己安坐不动，众星自然环绕——以身作则的力量。</a:t>
-            </a:r>
-          </a:p>
-        </p:txBody>
-      </p:sp>
-      <p:sp>
-        <p:nvSpPr>
-          <p:cNvPr id="7" name="TextBox 6"/>
-          <p:cNvSpPr txBox="1"/>
-          <p:nvPr/>
-        </p:nvSpPr>
-        <p:spPr>
-          <a:xfrm>
-            <a:off x="457200" y="5120640"/>
-            <a:ext cx="8229600" cy="1097280"/>
-          </a:xfrm>
-          <a:prstGeom prst="rect">
-            <a:avLst/>
-          </a:prstGeom>
-          <a:noFill/>
-        </p:spPr>
-        <p:txBody>
-          <a:bodyPr wrap="square">
-            <a:spAutoFit/>
-          </a:bodyPr>
-          <a:lstStyle/>
-          <a:p>
-            <a:pPr>
-              <a:defRPr sz="1900" b="1">
-                <a:solidFill>
-                  <a:srgbClr val="1E3C72"/>
-                </a:solidFill>
-              </a:defRPr>
-            </a:pPr>
-            <a:r>
-              <a:t>3. 无为而治</a:t>
-            </a:r>
-          </a:p>
-          <a:p>
-            <a:pPr>
-              <a:defRPr sz="1600">
-                <a:solidFill>
-                  <a:srgbClr val="333333"/>
-                </a:solidFill>
-              </a:defRPr>
-            </a:pPr>
-            <a:r>
-              <a:t>最高的领导是不需要刻意管理的，德行所至，人心自服——这也是道家的理想。</a:t>
-            </a:r>
-          </a:p>
-        </p:txBody>
-      </p:sp>
-      <p:sp>
-        <p:nvSpPr>
-          <p:cNvPr id="8" name="TextBox 7"/>
-          <p:cNvSpPr txBox="1"/>
-          <p:nvPr/>
-        </p:nvSpPr>
-        <p:spPr>
-          <a:xfrm>
-            <a:off x="8229600" y="6583680"/>
-            <a:ext cx="731520" cy="274320"/>
-          </a:xfrm>
-          <a:prstGeom prst="rect">
-            <a:avLst/>
-          </a:prstGeom>
-          <a:noFill/>
-        </p:spPr>
-        <p:txBody>
-          <a:bodyPr wrap="none">
-            <a:spAutoFit/>
-          </a:bodyPr>
-          <a:lstStyle/>
-          <a:p>
-            <a:pPr algn="r">
-              <a:defRPr sz="1200">
-                <a:solidFill>
-                  <a:srgbClr val="969696"/>
-                </a:solidFill>
-              </a:defRPr>
-            </a:pPr>
-            <a:r>
-              <a:t>4/14</a:t>
-            </a:r>
-          </a:p>
-        </p:txBody>
-      </p:sp>
-    </p:spTree>
-  </p:cSld>
-  <p:clrMapOvr>
-    <a:masterClrMapping/>
-  </p:clrMapOvr>
-</p:sld>
-</file>
-
-<file path=ppt/slides/slide5.xml><?xml version="1.0" encoding="utf-8"?>
-<p:sld xmlns:a="http://schemas.openxmlformats.org/drawingml/2006/main" xmlns:p="http://schemas.openxmlformats.org/presentationml/2006/main" xmlns:r="http://schemas.openxmlformats.org/officeDocument/2006/relationships">
-  <p:cSld>
-    <p:spTree>
-      <p:nvGrpSpPr>
-        <p:cNvPr id="1" name=""/>
-        <p:cNvGrpSpPr/>
-        <p:nvPr/>
-      </p:nvGrpSpPr>
-      <p:grpSpPr/>
-      <p:sp>
-        <p:nvSpPr>
-          <p:cNvPr id="2" name="Rectangle 1"/>
-          <p:cNvSpPr/>
-          <p:nvPr/>
-        </p:nvSpPr>
-        <p:spPr>
-          <a:xfrm>
-            <a:off x="0" y="0"/>
-            <a:ext cx="9144000" cy="1188720"/>
-          </a:xfrm>
-          <a:prstGeom prst="rect">
-            <a:avLst/>
-          </a:prstGeom>
-          <a:solidFill>
-            <a:srgbClr val="1E3C72"/>
-          </a:solidFill>
-          <a:ln>
-            <a:noFill/>
-          </a:ln>
-        </p:spPr>
-        <p:style>
-          <a:lnRef idx="1">
-            <a:schemeClr val="accent1"/>
-          </a:lnRef>
-          <a:fillRef idx="3">
-            <a:schemeClr val="accent1"/>
-          </a:fillRef>
-          <a:effectRef idx="2">
-            <a:schemeClr val="accent1"/>
-          </a:effectRef>
-          <a:fontRef idx="minor">
-            <a:schemeClr val="lt1"/>
-          </a:fontRef>
-        </p:style>
-        <p:txBody>
-          <a:bodyPr rtlCol="0" anchor="ctr"/>
-          <a:lstStyle/>
-          <a:p>
-            <a:pPr algn="ctr"/>
-          </a:p>
-        </p:txBody>
-      </p:sp>
-      <p:sp>
-        <p:nvSpPr>
-          <p:cNvPr id="3" name="TextBox 2"/>
-          <p:cNvSpPr txBox="1"/>
-          <p:nvPr/>
-        </p:nvSpPr>
-        <p:spPr>
-          <a:xfrm>
-            <a:off x="457200" y="228600"/>
-            <a:ext cx="8229600" cy="731520"/>
-          </a:xfrm>
-          <a:prstGeom prst="rect">
-            <a:avLst/>
-          </a:prstGeom>
-          <a:noFill/>
-        </p:spPr>
-        <p:txBody>
-          <a:bodyPr wrap="none">
-            <a:spAutoFit/>
-          </a:bodyPr>
-          <a:lstStyle/>
-          <a:p>
-            <a:pPr>
-              <a:defRPr sz="3400" b="1">
-                <a:solidFill>
-                  <a:srgbClr val="FFFFFF"/>
-                </a:solidFill>
-              </a:defRPr>
-            </a:pPr>
-            <a:r>
-              <a:t>Chapter 5 - Si Wu Xie (思无邪)</a:t>
-            </a:r>
-          </a:p>
-        </p:txBody>
-      </p:sp>
-      <p:sp>
-        <p:nvSpPr>
-          <p:cNvPr id="4" name="Rounded Rectangle 3"/>
-          <p:cNvSpPr/>
-          <p:nvPr/>
-        </p:nvSpPr>
-        <p:spPr>
-          <a:xfrm>
-            <a:off x="457200" y="1371600"/>
-            <a:ext cx="8229600" cy="3474720"/>
-          </a:xfrm>
-          <a:prstGeom prst="roundRect">
-            <a:avLst/>
-          </a:prstGeom>
-          <a:solidFill>
-            <a:srgbClr val="F5F5F0"/>
-          </a:solidFill>
-        </p:spPr>
-        <p:style>
-          <a:lnRef idx="1">
-            <a:schemeClr val="accent1"/>
-          </a:lnRef>
-          <a:fillRef idx="3">
-            <a:schemeClr val="accent1"/>
-          </a:fillRef>
-          <a:effectRef idx="2">
-            <a:schemeClr val="accent1"/>
-          </a:effectRef>
-          <a:fontRef idx="minor">
-            <a:schemeClr val="lt1"/>
-          </a:fontRef>
-        </p:style>
-        <p:txBody>
-          <a:bodyPr rtlCol="0" anchor="ctr" wrap="square"/>
-          <a:lstStyle/>
-          <a:p>
-            <a:pPr algn="ctr">
-              <a:defRPr sz="1800" b="1">
-                <a:solidFill>
-                  <a:srgbClr val="1E3C72"/>
-                </a:solidFill>
-              </a:defRPr>
-            </a:pPr>
-            <a:r>
-              <a:t>[Original Text]</a:t>
-            </a:r>
-          </a:p>
-          <a:p>
-            <a:pPr>
-              <a:spcBef>
-                <a:spcPts val="400"/>
-              </a:spcBef>
-              <a:defRPr sz="2200">
-                <a:solidFill>
-                  <a:srgbClr val="333333"/>
-                </a:solidFill>
-              </a:defRPr>
-            </a:pPr>
-            <a:r>
-              <a:t>Zi Yue: 'Shi San Bai, Yi Yan Yi Bi Zhi,</a:t>
-            </a:r>
-          </a:p>
-          <a:p>
-            <a:pPr>
-              <a:spcBef>
-                <a:spcPts val="400"/>
-              </a:spcBef>
-              <a:defRPr sz="2200">
-                <a:solidFill>
-                  <a:srgbClr val="333333"/>
-                </a:solidFill>
-              </a:defRPr>
-            </a:pPr>
-            <a:r>
-              <a:t>Yue: 'Si Wu Xie.'"</a:t>
-            </a:r>
-          </a:p>
-        </p:txBody>
-      </p:sp>
-      <p:sp>
-        <p:nvSpPr>
-          <p:cNvPr id="5" name="Rounded Rectangle 4"/>
-          <p:cNvSpPr/>
-          <p:nvPr/>
-        </p:nvSpPr>
-        <p:spPr>
-          <a:xfrm>
-            <a:off x="457200" y="4937760"/>
-            <a:ext cx="8229600" cy="1005840"/>
-          </a:xfrm>
-          <a:prstGeom prst="roundRect">
-            <a:avLst/>
-          </a:prstGeom>
-          <a:solidFill>
-            <a:srgbClr val="4682B4"/>
-          </a:solidFill>
-        </p:spPr>
-        <p:style>
-          <a:lnRef idx="1">
-            <a:schemeClr val="accent1"/>
-          </a:lnRef>
-          <a:fillRef idx="3">
-            <a:schemeClr val="accent1"/>
-          </a:fillRef>
-          <a:effectRef idx="2">
-            <a:schemeClr val="accent1"/>
-          </a:effectRef>
-          <a:fontRef idx="minor">
-            <a:schemeClr val="lt1"/>
-          </a:fontRef>
-        </p:style>
-        <p:txBody>
-          <a:bodyPr rtlCol="0" anchor="ctr" wrap="square"/>
-          <a:lstStyle/>
-          <a:p>
-            <a:pPr algn="ctr">
-              <a:defRPr sz="1600">
-                <a:solidFill>
-                  <a:srgbClr val="FFFFFF"/>
-                </a:solidFill>
-              </a:defRPr>
-            </a:pPr>
-            <a:r>
-              <a:t>[Translation] 孔子说：《诗经》三百首，用一句话来概括，就是'思想纯正'。</a:t>
-            </a:r>
-          </a:p>
-          <a:p>
-            <a:pPr>
-              <a:defRPr sz="1500" i="1">
-                <a:solidFill>
-                  <a:srgbClr val="DCDCFF"/>
-                </a:solidFill>
-              </a:defRPr>
-            </a:pPr>
-            <a:r>
-              <a:t>[EN] Confucius said: 'The Book of Songs has three hundred pieces, yet they can be summed up in one phrase: having a heart free of evil.'</a:t>
-            </a:r>
-          </a:p>
-        </p:txBody>
-      </p:sp>
-      <p:sp>
-        <p:nvSpPr>
-          <p:cNvPr id="6" name="TextBox 5"/>
-          <p:cNvSpPr txBox="1"/>
-          <p:nvPr/>
-        </p:nvSpPr>
-        <p:spPr>
-          <a:xfrm>
-            <a:off x="8229600" y="6583680"/>
-            <a:ext cx="731520" cy="274320"/>
-          </a:xfrm>
-          <a:prstGeom prst="rect">
-            <a:avLst/>
-          </a:prstGeom>
-          <a:noFill/>
-        </p:spPr>
-        <p:txBody>
-          <a:bodyPr wrap="none">
-            <a:spAutoFit/>
-          </a:bodyPr>
-          <a:lstStyle/>
-          <a:p>
-            <a:pPr algn="r">
-              <a:defRPr sz="1200">
-                <a:solidFill>
-                  <a:srgbClr val="969696"/>
-                </a:solidFill>
-              </a:defRPr>
-            </a:pPr>
-            <a:r>
-              <a:t>5/14</a:t>
-            </a:r>
-          </a:p>
-        </p:txBody>
-      </p:sp>
-    </p:spTree>
-  </p:cSld>
-  <p:clrMapOvr>
-    <a:masterClrMapping/>
-  </p:clrMapOvr>
-</p:sld>
-</file>
-
-<file path=ppt/slides/slide6.xml><?xml version="1.0" encoding="utf-8"?>
-<p:sld xmlns:a="http://schemas.openxmlformats.org/drawingml/2006/main" xmlns:p="http://schemas.openxmlformats.org/presentationml/2006/main" xmlns:r="http://schemas.openxmlformats.org/officeDocument/2006/relationships">
-  <p:cSld>
-    <p:spTree>
-      <p:nvGrpSpPr>
-        <p:cNvPr id="1" name=""/>
-        <p:cNvGrpSpPr/>
-        <p:nvPr/>
-      </p:nvGrpSpPr>
-      <p:grpSpPr/>
-      <p:sp>
-        <p:nvSpPr>
-          <p:cNvPr id="2" name="Rectangle 1"/>
-          <p:cNvSpPr/>
-          <p:nvPr/>
-        </p:nvSpPr>
-        <p:spPr>
-          <a:xfrm>
-            <a:off x="0" y="0"/>
-            <a:ext cx="9144000" cy="1188720"/>
-          </a:xfrm>
-          <a:prstGeom prst="rect">
-            <a:avLst/>
-          </a:prstGeom>
-          <a:solidFill>
-            <a:srgbClr val="1E3C72"/>
-          </a:solidFill>
-          <a:ln>
-            <a:noFill/>
-          </a:ln>
-        </p:spPr>
-        <p:style>
-          <a:lnRef idx="1">
-            <a:schemeClr val="accent1"/>
-          </a:lnRef>
-          <a:fillRef idx="3">
-            <a:schemeClr val="accent1"/>
-          </a:fillRef>
-          <a:effectRef idx="2">
-            <a:schemeClr val="accent1"/>
-          </a:effectRef>
-          <a:fontRef idx="minor">
-            <a:schemeClr val="lt1"/>
-          </a:fontRef>
-        </p:style>
-        <p:txBody>
-          <a:bodyPr rtlCol="0" anchor="ctr"/>
-          <a:lstStyle/>
-          <a:p>
-            <a:pPr algn="ctr"/>
-          </a:p>
-        </p:txBody>
-      </p:sp>
-      <p:sp>
-        <p:nvSpPr>
-          <p:cNvPr id="3" name="TextBox 2"/>
-          <p:cNvSpPr txBox="1"/>
-          <p:nvPr/>
-        </p:nvSpPr>
-        <p:spPr>
-          <a:xfrm>
-            <a:off x="457200" y="228600"/>
-            <a:ext cx="8229600" cy="731520"/>
-          </a:xfrm>
-          <a:prstGeom prst="rect">
-            <a:avLst/>
-          </a:prstGeom>
-          <a:noFill/>
-        </p:spPr>
-        <p:txBody>
-          <a:bodyPr wrap="none">
-            <a:spAutoFit/>
-          </a:bodyPr>
-          <a:lstStyle/>
-          <a:p>
-            <a:pPr>
-              <a:defRPr sz="3400" b="1">
-                <a:solidFill>
-                  <a:srgbClr val="FFFFFF"/>
-                </a:solidFill>
-              </a:defRPr>
-            </a:pPr>
-            <a:r>
-              <a:t>Chapter 5 - Si Wu Xie (思无邪) [Annotations]</a:t>
-            </a:r>
-          </a:p>
-        </p:txBody>
-      </p:sp>
-      <p:sp>
-        <p:nvSpPr>
-          <p:cNvPr id="4" name="Rounded Rectangle 3"/>
-          <p:cNvSpPr/>
-          <p:nvPr/>
-        </p:nvSpPr>
-        <p:spPr>
-          <a:xfrm>
-            <a:off x="457200" y="1371600"/>
-            <a:ext cx="8229600" cy="3840480"/>
-          </a:xfrm>
-          <a:prstGeom prst="roundRect">
-            <a:avLst/>
-          </a:prstGeom>
-          <a:solidFill>
-            <a:srgbClr val="F5F5F0"/>
-          </a:solidFill>
-        </p:spPr>
-        <p:style>
-          <a:lnRef idx="1">
-            <a:schemeClr val="accent1"/>
-          </a:lnRef>
-          <a:fillRef idx="3">
-            <a:schemeClr val="accent1"/>
-          </a:fillRef>
-          <a:effectRef idx="2">
-            <a:schemeClr val="accent1"/>
-          </a:effectRef>
-          <a:fontRef idx="minor">
-            <a:schemeClr val="lt1"/>
-          </a:fontRef>
-        </p:style>
-        <p:txBody>
-          <a:bodyPr rtlCol="0" anchor="ctr" wrap="square"/>
-          <a:lstStyle/>
-          <a:p>
-            <a:pPr algn="ctr">
-              <a:defRPr sz="1800" b="1">
-                <a:solidFill>
-                  <a:srgbClr val="1E3C72"/>
-                </a:solidFill>
-              </a:defRPr>
-            </a:pPr>
-            <a:r>
-              <a:t>[Annotations]</a:t>
-            </a:r>
-          </a:p>
-          <a:p>
-            <a:pPr>
-              <a:spcBef>
-                <a:spcPts val="500"/>
-              </a:spcBef>
-              <a:defRPr sz="1700">
-                <a:solidFill>
-                  <a:srgbClr val="333333"/>
-                </a:solidFill>
-              </a:defRPr>
-            </a:pPr>
-            <a:r>
-              <a:t>* Shi San Bai (诗三百): The Book of Songs has 305 pieces, here as an approximate</a:t>
-            </a:r>
-          </a:p>
-          <a:p>
-            <a:pPr>
-              <a:spcBef>
-                <a:spcPts val="500"/>
-              </a:spcBef>
-              <a:defRPr sz="1700">
-                <a:solidFill>
-                  <a:srgbClr val="333333"/>
-                </a:solidFill>
-              </a:defRPr>
-            </a:pPr>
-            <a:r>
-              <a:t>* Bi (蔽): Summarize, conclude</a:t>
-            </a:r>
-          </a:p>
-          <a:p>
-            <a:pPr>
-              <a:spcBef>
-                <a:spcPts val="500"/>
-              </a:spcBef>
-              <a:defRPr sz="1700">
-                <a:solidFill>
-                  <a:srgbClr val="333333"/>
-                </a:solidFill>
-              </a:defRPr>
-            </a:pPr>
-            <a:r>
-              <a:t>* Si Wu Xie (思无邪): Pure thoughts, free from evil</a:t>
-            </a:r>
-          </a:p>
-        </p:txBody>
-      </p:sp>
-      <p:sp>
-        <p:nvSpPr>
-          <p:cNvPr id="5" name="TextBox 4"/>
-          <p:cNvSpPr txBox="1"/>
-          <p:nvPr/>
-        </p:nvSpPr>
-        <p:spPr>
-          <a:xfrm>
-            <a:off x="8229600" y="6583680"/>
-            <a:ext cx="731520" cy="274320"/>
-          </a:xfrm>
-          <a:prstGeom prst="rect">
-            <a:avLst/>
-          </a:prstGeom>
-          <a:noFill/>
-        </p:spPr>
-        <p:txBody>
-          <a:bodyPr wrap="none">
-            <a:spAutoFit/>
-          </a:bodyPr>
-          <a:lstStyle/>
-          <a:p>
-            <a:pPr algn="r">
-              <a:defRPr sz="1200">
-                <a:solidFill>
-                  <a:srgbClr val="969696"/>
-                </a:solidFill>
-              </a:defRPr>
-            </a:pPr>
-            <a:r>
-              <a:t>6/14</a:t>
-            </a:r>
-          </a:p>
-        </p:txBody>
-      </p:sp>
-    </p:spTree>
-  </p:cSld>
-  <p:clrMapOvr>
-    <a:masterClrMapping/>
-  </p:clrMapOvr>
-</p:sld>
-</file>
-
-<file path=ppt/slides/slide7.xml><?xml version="1.0" encoding="utf-8"?>
-<p:sld xmlns:a="http://schemas.openxmlformats.org/drawingml/2006/main" xmlns:p="http://schemas.openxmlformats.org/presentationml/2006/main" xmlns:r="http://schemas.openxmlformats.org/officeDocument/2006/relationships">
-  <p:cSld>
-    <p:spTree>
-      <p:nvGrpSpPr>
-        <p:cNvPr id="1" name=""/>
-        <p:cNvGrpSpPr/>
-        <p:nvPr/>
-      </p:nvGrpSpPr>
-      <p:grpSpPr/>
-      <p:sp>
-        <p:nvSpPr>
-          <p:cNvPr id="2" name="Rectangle 1"/>
-          <p:cNvSpPr/>
-          <p:nvPr/>
-        </p:nvSpPr>
-        <p:spPr>
-          <a:xfrm>
-            <a:off x="0" y="0"/>
-            <a:ext cx="9144000" cy="1188720"/>
-          </a:xfrm>
-          <a:prstGeom prst="rect">
-            <a:avLst/>
-          </a:prstGeom>
-          <a:solidFill>
-            <a:srgbClr val="1E3C72"/>
-          </a:solidFill>
-          <a:ln>
-            <a:noFill/>
-          </a:ln>
-        </p:spPr>
-        <p:style>
-          <a:lnRef idx="1">
-            <a:schemeClr val="accent1"/>
-          </a:lnRef>
-          <a:fillRef idx="3">
-            <a:schemeClr val="accent1"/>
-          </a:fillRef>
-          <a:effectRef idx="2">
-            <a:schemeClr val="accent1"/>
-          </a:effectRef>
-          <a:fontRef idx="minor">
-            <a:schemeClr val="lt1"/>
-          </a:fontRef>
-        </p:style>
-        <p:txBody>
-          <a:bodyPr rtlCol="0" anchor="ctr"/>
-          <a:lstStyle/>
-          <a:p>
-            <a:pPr algn="ctr"/>
-          </a:p>
-        </p:txBody>
-      </p:sp>
-      <p:sp>
-        <p:nvSpPr>
-          <p:cNvPr id="3" name="TextBox 2"/>
-          <p:cNvSpPr txBox="1"/>
-          <p:nvPr/>
-        </p:nvSpPr>
-        <p:spPr>
-          <a:xfrm>
-            <a:off x="457200" y="228600"/>
-            <a:ext cx="8229600" cy="731520"/>
-          </a:xfrm>
-          <a:prstGeom prst="rect">
-            <a:avLst/>
-          </a:prstGeom>
-          <a:noFill/>
-        </p:spPr>
-        <p:txBody>
-          <a:bodyPr wrap="none">
-            <a:spAutoFit/>
-          </a:bodyPr>
-          <a:lstStyle/>
-          <a:p>
-            <a:pPr>
-              <a:defRPr sz="3400" b="1">
-                <a:solidFill>
-                  <a:srgbClr val="FFFFFF"/>
-                </a:solidFill>
-              </a:defRPr>
-            </a:pPr>
-            <a:r>
-              <a:t>Chapter 5 - Core Ideas</a:t>
-            </a:r>
-          </a:p>
-        </p:txBody>
-      </p:sp>
-      <p:sp>
-        <p:nvSpPr>
-          <p:cNvPr id="4" name="Rounded Rectangle 3"/>
-          <p:cNvSpPr/>
-          <p:nvPr/>
-        </p:nvSpPr>
-        <p:spPr>
-          <a:xfrm>
-            <a:off x="457200" y="1371600"/>
-            <a:ext cx="8229600" cy="1371600"/>
-          </a:xfrm>
-          <a:prstGeom prst="roundRect">
-            <a:avLst/>
-          </a:prstGeom>
-          <a:solidFill>
-            <a:srgbClr val="4682B4"/>
-          </a:solidFill>
-        </p:spPr>
-        <p:style>
-          <a:lnRef idx="1">
-            <a:schemeClr val="accent1"/>
-          </a:lnRef>
-          <a:fillRef idx="3">
-            <a:schemeClr val="accent1"/>
-          </a:fillRef>
-          <a:effectRef idx="2">
-            <a:schemeClr val="accent1"/>
-          </a:effectRef>
-          <a:fontRef idx="minor">
-            <a:schemeClr val="lt1"/>
-          </a:fontRef>
-        </p:style>
-        <p:txBody>
-          <a:bodyPr rtlCol="0" anchor="ctr" wrap="square"/>
-          <a:lstStyle/>
-          <a:p>
-            <a:pPr algn="ctr">
-              <a:defRPr sz="2000" b="1">
-                <a:solidFill>
-                  <a:srgbClr val="FFFFFF"/>
-                </a:solidFill>
-              </a:defRPr>
-            </a:pPr>
-            <a:r>
-              <a:t>Core Concept</a:t>
-            </a:r>
-          </a:p>
-          <a:p>
-            <a:pPr>
-              <a:defRPr sz="1700">
-                <a:solidFill>
-                  <a:srgbClr val="E6E6E6"/>
-                </a:solidFill>
-              </a:defRPr>
-            </a:pPr>
-            <a:r>
-              <a:t>思无邪: Confucius's 'Poetry Education' thought remains significant today. Modern ps...</a:t>
-            </a:r>
-          </a:p>
-        </p:txBody>
-      </p:sp>
-      <p:sp>
-        <p:nvSpPr>
-          <p:cNvPr id="5" name="TextBox 4"/>
-          <p:cNvSpPr txBox="1"/>
-          <p:nvPr/>
-        </p:nvSpPr>
-        <p:spPr>
-          <a:xfrm>
-            <a:off x="457200" y="2926080"/>
-            <a:ext cx="8229600" cy="1097280"/>
-          </a:xfrm>
-          <a:prstGeom prst="rect">
-            <a:avLst/>
-          </a:prstGeom>
-          <a:noFill/>
-        </p:spPr>
-        <p:txBody>
-          <a:bodyPr wrap="square">
-            <a:spAutoFit/>
-          </a:bodyPr>
-          <a:lstStyle/>
-          <a:p>
-            <a:pPr>
-              <a:defRPr sz="1900" b="1">
-                <a:solidFill>
-                  <a:srgbClr val="1E3C72"/>
-                </a:solidFill>
-              </a:defRPr>
-            </a:pPr>
-            <a:r>
-              <a:t>1. 诗教功能</a:t>
-            </a:r>
-          </a:p>
-          <a:p>
-            <a:pPr>
-              <a:defRPr sz="1600">
-                <a:solidFill>
-                  <a:srgbClr val="333333"/>
-                </a:solidFill>
-              </a:defRPr>
-            </a:pPr>
-            <a:r>
-              <a:t>《诗经》能让人思想纯正——文学有教化人心的力量。</a:t>
-            </a:r>
-          </a:p>
-        </p:txBody>
-      </p:sp>
-      <p:sp>
-        <p:nvSpPr>
-          <p:cNvPr id="6" name="TextBox 5"/>
-          <p:cNvSpPr txBox="1"/>
-          <p:nvPr/>
-        </p:nvSpPr>
-        <p:spPr>
-          <a:xfrm>
-            <a:off x="457200" y="4023360"/>
-            <a:ext cx="8229600" cy="1097280"/>
-          </a:xfrm>
-          <a:prstGeom prst="rect">
-            <a:avLst/>
-          </a:prstGeom>
-          <a:noFill/>
-        </p:spPr>
-        <p:txBody>
-          <a:bodyPr wrap="square">
-            <a:spAutoFit/>
-          </a:bodyPr>
-          <a:lstStyle/>
-          <a:p>
-            <a:pPr>
-              <a:defRPr sz="1900" b="1">
-                <a:solidFill>
-                  <a:srgbClr val="1E3C72"/>
-                </a:solidFill>
-              </a:defRPr>
-            </a:pPr>
-            <a:r>
-              <a:t>2. 思无邪</a:t>
-            </a:r>
-          </a:p>
-          <a:p>
-            <a:pPr>
-              <a:defRPr sz="1600">
-                <a:solidFill>
-                  <a:srgbClr val="333333"/>
-                </a:solidFill>
-              </a:defRPr>
-            </a:pPr>
-            <a:r>
-              <a:t>真正美好的诗歌，能净化人的心灵，让人思想纯正、情感真挚。</a:t>
-            </a:r>
-          </a:p>
-        </p:txBody>
-      </p:sp>
-      <p:sp>
-        <p:nvSpPr>
-          <p:cNvPr id="7" name="TextBox 6"/>
-          <p:cNvSpPr txBox="1"/>
-          <p:nvPr/>
-        </p:nvSpPr>
-        <p:spPr>
-          <a:xfrm>
-            <a:off x="457200" y="5120640"/>
-            <a:ext cx="8229600" cy="1097280"/>
-          </a:xfrm>
-          <a:prstGeom prst="rect">
-            <a:avLst/>
-          </a:prstGeom>
-          <a:noFill/>
-        </p:spPr>
-        <p:txBody>
-          <a:bodyPr wrap="square">
-            <a:spAutoFit/>
-          </a:bodyPr>
-          <a:lstStyle/>
-          <a:p>
-            <a:pPr>
-              <a:defRPr sz="1900" b="1">
-                <a:solidFill>
-                  <a:srgbClr val="1E3C72"/>
-                </a:solidFill>
-              </a:defRPr>
-            </a:pPr>
-            <a:r>
-              <a:t>3. 情感到理</a:t>
-            </a:r>
-          </a:p>
-          <a:p>
-            <a:pPr>
-              <a:defRPr sz="1600">
-                <a:solidFill>
-                  <a:srgbClr val="333333"/>
-                </a:solidFill>
-              </a:defRPr>
-            </a:pPr>
-            <a:r>
-              <a:t>从真挚情感出发，到达道德境界——诗是情感的桥梁。</a:t>
-            </a:r>
-          </a:p>
-        </p:txBody>
-      </p:sp>
-      <p:sp>
-        <p:nvSpPr>
-          <p:cNvPr id="8" name="TextBox 7"/>
-          <p:cNvSpPr txBox="1"/>
-          <p:nvPr/>
-        </p:nvSpPr>
-        <p:spPr>
-          <a:xfrm>
-            <a:off x="8229600" y="6583680"/>
-            <a:ext cx="731520" cy="274320"/>
-          </a:xfrm>
-          <a:prstGeom prst="rect">
-            <a:avLst/>
-          </a:prstGeom>
-          <a:noFill/>
-        </p:spPr>
-        <p:txBody>
-          <a:bodyPr wrap="none">
-            <a:spAutoFit/>
-          </a:bodyPr>
-          <a:lstStyle/>
-          <a:p>
-            <a:pPr algn="r">
-              <a:defRPr sz="1200">
-                <a:solidFill>
-                  <a:srgbClr val="969696"/>
-                </a:solidFill>
-              </a:defRPr>
-            </a:pPr>
-            <a:r>
-              <a:t>7/14</a:t>
-            </a:r>
-          </a:p>
-        </p:txBody>
-      </p:sp>
-    </p:spTree>
-  </p:cSld>
-  <p:clrMapOvr>
-    <a:masterClrMapping/>
-  </p:clrMapOvr>
-</p:sld>
-</file>
-
-<file path=ppt/slides/slide8.xml><?xml version="1.0" encoding="utf-8"?>
-<p:sld xmlns:a="http://schemas.openxmlformats.org/drawingml/2006/main" xmlns:p="http://schemas.openxmlformats.org/presentationml/2006/main" xmlns:r="http://schemas.openxmlformats.org/officeDocument/2006/relationships">
-  <p:cSld>
-    <p:spTree>
-      <p:nvGrpSpPr>
-        <p:cNvPr id="1" name=""/>
-        <p:cNvGrpSpPr/>
-        <p:nvPr/>
-      </p:nvGrpSpPr>
-      <p:grpSpPr/>
-      <p:sp>
-        <p:nvSpPr>
-          <p:cNvPr id="2" name="Rectangle 1"/>
-          <p:cNvSpPr/>
-          <p:nvPr/>
-        </p:nvSpPr>
-        <p:spPr>
-          <a:xfrm>
-            <a:off x="0" y="0"/>
-            <a:ext cx="9144000" cy="1188720"/>
-          </a:xfrm>
-          <a:prstGeom prst="rect">
-            <a:avLst/>
-          </a:prstGeom>
-          <a:solidFill>
-            <a:srgbClr val="1E3C72"/>
-          </a:solidFill>
-          <a:ln>
-            <a:noFill/>
-          </a:ln>
-        </p:spPr>
-        <p:style>
-          <a:lnRef idx="1">
-            <a:schemeClr val="accent1"/>
-          </a:lnRef>
-          <a:fillRef idx="3">
-            <a:schemeClr val="accent1"/>
-          </a:fillRef>
-          <a:effectRef idx="2">
-            <a:schemeClr val="accent1"/>
-          </a:effectRef>
-          <a:fontRef idx="minor">
-            <a:schemeClr val="lt1"/>
-          </a:fontRef>
-        </p:style>
-        <p:txBody>
-          <a:bodyPr rtlCol="0" anchor="ctr"/>
-          <a:lstStyle/>
-          <a:p>
-            <a:pPr algn="ctr"/>
-          </a:p>
-        </p:txBody>
-      </p:sp>
-      <p:sp>
-        <p:nvSpPr>
-          <p:cNvPr id="3" name="TextBox 2"/>
-          <p:cNvSpPr txBox="1"/>
-          <p:nvPr/>
-        </p:nvSpPr>
-        <p:spPr>
-          <a:xfrm>
-            <a:off x="457200" y="228600"/>
-            <a:ext cx="8229600" cy="731520"/>
-          </a:xfrm>
-          <a:prstGeom prst="rect">
-            <a:avLst/>
-          </a:prstGeom>
-          <a:noFill/>
-        </p:spPr>
-        <p:txBody>
-          <a:bodyPr wrap="none">
-            <a:spAutoFit/>
-          </a:bodyPr>
-          <a:lstStyle/>
-          <a:p>
-            <a:pPr>
-              <a:defRPr sz="3400" b="1">
-                <a:solidFill>
-                  <a:srgbClr val="FFFFFF"/>
-                </a:solidFill>
-              </a:defRPr>
-            </a:pPr>
-            <a:r>
-              <a:t>Chapter 6 - Wen Gu Zhi Xin (温故知新)</a:t>
-            </a:r>
-          </a:p>
-        </p:txBody>
-      </p:sp>
-      <p:sp>
-        <p:nvSpPr>
-          <p:cNvPr id="4" name="Rounded Rectangle 3"/>
-          <p:cNvSpPr/>
-          <p:nvPr/>
-        </p:nvSpPr>
-        <p:spPr>
-          <a:xfrm>
-            <a:off x="457200" y="1371600"/>
-            <a:ext cx="8229600" cy="3474720"/>
-          </a:xfrm>
-          <a:prstGeom prst="roundRect">
-            <a:avLst/>
-          </a:prstGeom>
-          <a:solidFill>
-            <a:srgbClr val="F5F5F0"/>
-          </a:solidFill>
-        </p:spPr>
-        <p:style>
-          <a:lnRef idx="1">
-            <a:schemeClr val="accent1"/>
-          </a:lnRef>
-          <a:fillRef idx="3">
-            <a:schemeClr val="accent1"/>
-          </a:fillRef>
-          <a:effectRef idx="2">
-            <a:schemeClr val="accent1"/>
-          </a:effectRef>
-          <a:fontRef idx="minor">
-            <a:schemeClr val="lt1"/>
-          </a:fontRef>
-        </p:style>
-        <p:txBody>
-          <a:bodyPr rtlCol="0" anchor="ctr" wrap="square"/>
-          <a:lstStyle/>
-          <a:p>
-            <a:pPr algn="ctr">
-              <a:defRPr sz="1800" b="1">
-                <a:solidFill>
-                  <a:srgbClr val="1E3C72"/>
-                </a:solidFill>
-              </a:defRPr>
-            </a:pPr>
-            <a:r>
-              <a:t>[Original Text]</a:t>
-            </a:r>
-          </a:p>
-          <a:p>
-            <a:pPr>
-              <a:spcBef>
-                <a:spcPts val="400"/>
-              </a:spcBef>
-              <a:defRPr sz="2200">
-                <a:solidFill>
-                  <a:srgbClr val="333333"/>
-                </a:solidFill>
-              </a:defRPr>
-            </a:pPr>
-            <a:r>
-              <a:t>Zi Yue: 'Wen Gu Er Zhi Xin, Ke Yi Wei Shi Yi.'"</a:t>
-            </a:r>
-          </a:p>
-        </p:txBody>
-      </p:sp>
-      <p:sp>
-        <p:nvSpPr>
-          <p:cNvPr id="5" name="Rounded Rectangle 4"/>
-          <p:cNvSpPr/>
-          <p:nvPr/>
-        </p:nvSpPr>
-        <p:spPr>
-          <a:xfrm>
-            <a:off x="457200" y="4937760"/>
-            <a:ext cx="8229600" cy="1005840"/>
-          </a:xfrm>
-          <a:prstGeom prst="roundRect">
-            <a:avLst/>
-          </a:prstGeom>
-          <a:solidFill>
-            <a:srgbClr val="4682B4"/>
-          </a:solidFill>
-        </p:spPr>
-        <p:style>
-          <a:lnRef idx="1">
-            <a:schemeClr val="accent1"/>
-          </a:lnRef>
-          <a:fillRef idx="3">
-            <a:schemeClr val="accent1"/>
-          </a:fillRef>
-          <a:effectRef idx="2">
-            <a:schemeClr val="accent1"/>
-          </a:effectRef>
-          <a:fontRef idx="minor">
-            <a:schemeClr val="lt1"/>
-          </a:fontRef>
-        </p:style>
-        <p:txBody>
-          <a:bodyPr rtlCol="0" anchor="ctr" wrap="square"/>
-          <a:lstStyle/>
-          <a:p>
-            <a:pPr algn="ctr">
-              <a:defRPr sz="1600">
-                <a:solidFill>
-                  <a:srgbClr val="FFFFFF"/>
-                </a:solidFill>
-              </a:defRPr>
-            </a:pPr>
-            <a:r>
-              <a:t>[Translation] 孔子说：温习学过的知识，并从中获得新的理解，这样的人可以当老师了。</a:t>
-            </a:r>
-          </a:p>
-          <a:p>
-            <a:pPr>
-              <a:defRPr sz="1500" i="1">
-                <a:solidFill>
-                  <a:srgbClr val="DCDCFF"/>
-                </a:solidFill>
-              </a:defRPr>
-            </a:pPr>
-            <a:r>
-              <a:t>[EN] Confucius said: 'One who reviews what has been learned and gains new understanding may become a teacher.'</a:t>
-            </a:r>
-          </a:p>
-        </p:txBody>
-      </p:sp>
-      <p:sp>
-        <p:nvSpPr>
-          <p:cNvPr id="6" name="TextBox 5"/>
-          <p:cNvSpPr txBox="1"/>
-          <p:nvPr/>
-        </p:nvSpPr>
-        <p:spPr>
-          <a:xfrm>
-            <a:off x="8229600" y="6583680"/>
-            <a:ext cx="731520" cy="274320"/>
-          </a:xfrm>
-          <a:prstGeom prst="rect">
-            <a:avLst/>
-          </a:prstGeom>
-          <a:noFill/>
-        </p:spPr>
-        <p:txBody>
-          <a:bodyPr wrap="none">
-            <a:spAutoFit/>
-          </a:bodyPr>
-          <a:lstStyle/>
-          <a:p>
-            <a:pPr algn="r">
-              <a:defRPr sz="1200">
-                <a:solidFill>
-                  <a:srgbClr val="969696"/>
-                </a:solidFill>
-              </a:defRPr>
-            </a:pPr>
-            <a:r>
-              <a:t>8/14</a:t>
-            </a:r>
-          </a:p>
-        </p:txBody>
-      </p:sp>
-    </p:spTree>
-  </p:cSld>
-  <p:clrMapOvr>
-    <a:masterClrMapping/>
-  </p:clrMapOvr>
-</p:sld>
-</file>
-
-<file path=ppt/slides/slide9.xml><?xml version="1.0" encoding="utf-8"?>
-<p:sld xmlns:a="http://schemas.openxmlformats.org/drawingml/2006/main" xmlns:p="http://schemas.openxmlformats.org/presentationml/2006/main" xmlns:r="http://schemas.openxmlformats.org/officeDocument/2006/relationships">
-  <p:cSld>
-    <p:spTree>
-      <p:nvGrpSpPr>
-        <p:cNvPr id="1" name=""/>
-        <p:cNvGrpSpPr/>
-        <p:nvPr/>
-      </p:nvGrpSpPr>
-      <p:grpSpPr/>
-      <p:sp>
-        <p:nvSpPr>
-          <p:cNvPr id="2" name="Rectangle 1"/>
-          <p:cNvSpPr/>
-          <p:nvPr/>
-        </p:nvSpPr>
-        <p:spPr>
-          <a:xfrm>
-            <a:off x="0" y="0"/>
-            <a:ext cx="9144000" cy="1188720"/>
-          </a:xfrm>
-          <a:prstGeom prst="rect">
-            <a:avLst/>
-          </a:prstGeom>
-          <a:solidFill>
-            <a:srgbClr val="1E3C72"/>
-          </a:solidFill>
-          <a:ln>
-            <a:noFill/>
-          </a:ln>
-        </p:spPr>
-        <p:style>
-          <a:lnRef idx="1">
-            <a:schemeClr val="accent1"/>
-          </a:lnRef>
-          <a:fillRef idx="3">
-            <a:schemeClr val="accent1"/>
-          </a:fillRef>
-          <a:effectRef idx="2">
-            <a:schemeClr val="accent1"/>
-          </a:effectRef>
-          <a:fontRef idx="minor">
-            <a:schemeClr val="lt1"/>
-          </a:fontRef>
-        </p:style>
-        <p:txBody>
-          <a:bodyPr rtlCol="0" anchor="ctr"/>
-          <a:lstStyle/>
-          <a:p>
-            <a:pPr algn="ctr"/>
-          </a:p>
-        </p:txBody>
-      </p:sp>
-      <p:sp>
-        <p:nvSpPr>
-          <p:cNvPr id="3" name="TextBox 2"/>
-          <p:cNvSpPr txBox="1"/>
-          <p:nvPr/>
-        </p:nvSpPr>
-        <p:spPr>
-          <a:xfrm>
-            <a:off x="457200" y="228600"/>
-            <a:ext cx="8229600" cy="731520"/>
-          </a:xfrm>
-          <a:prstGeom prst="rect">
-            <a:avLst/>
-          </a:prstGeom>
-          <a:noFill/>
-        </p:spPr>
-        <p:txBody>
-          <a:bodyPr wrap="none">
-            <a:spAutoFit/>
-          </a:bodyPr>
-          <a:lstStyle/>
-          <a:p>
-            <a:pPr>
-              <a:defRPr sz="3400" b="1">
-                <a:solidFill>
-                  <a:srgbClr val="FFFFFF"/>
-                </a:solidFill>
-              </a:defRPr>
-            </a:pPr>
-            <a:r>
-              <a:t>Chapter 6 - Wen Gu Zhi Xin (温故知新) [Annotations]</a:t>
-            </a:r>
-          </a:p>
-        </p:txBody>
-      </p:sp>
-      <p:sp>
-        <p:nvSpPr>
-          <p:cNvPr id="4" name="Rounded Rectangle 3"/>
-          <p:cNvSpPr/>
-          <p:nvPr/>
-        </p:nvSpPr>
-        <p:spPr>
-          <a:xfrm>
-            <a:off x="457200" y="1371600"/>
-            <a:ext cx="8229600" cy="3840480"/>
-          </a:xfrm>
-          <a:prstGeom prst="roundRect">
-            <a:avLst/>
-          </a:prstGeom>
-          <a:solidFill>
-            <a:srgbClr val="F5F5F0"/>
-          </a:solidFill>
-        </p:spPr>
-        <p:style>
-          <a:lnRef idx="1">
-            <a:schemeClr val="accent1"/>
-          </a:lnRef>
-          <a:fillRef idx="3">
-            <a:schemeClr val="accent1"/>
-          </a:fillRef>
-          <a:effectRef idx="2">
-            <a:schemeClr val="accent1"/>
-          </a:effectRef>
-          <a:fontRef idx="minor">
-            <a:schemeClr val="lt1"/>
-          </a:fontRef>
-        </p:style>
-        <p:txBody>
-          <a:bodyPr rtlCol="0" anchor="ctr" wrap="square"/>
-          <a:lstStyle/>
-          <a:p>
-            <a:pPr algn="ctr">
-              <a:defRPr sz="1800" b="1">
-                <a:solidFill>
-                  <a:srgbClr val="1E3C72"/>
-                </a:solidFill>
-              </a:defRPr>
-            </a:pPr>
-            <a:r>
-              <a:t>[Annotations]</a:t>
-            </a:r>
-          </a:p>
-          <a:p>
-            <a:pPr>
-              <a:spcBef>
-                <a:spcPts val="500"/>
-              </a:spcBef>
-              <a:defRPr sz="1700">
-                <a:solidFill>
-                  <a:srgbClr val="333333"/>
-                </a:solidFill>
-              </a:defRPr>
-            </a:pPr>
-            <a:r>
-              <a:t>* Wen Gu (温故): Review learned knowledge</a:t>
-            </a:r>
-          </a:p>
-          <a:p>
-            <a:pPr>
-              <a:spcBef>
-                <a:spcPts val="500"/>
-              </a:spcBef>
-              <a:defRPr sz="1700">
-                <a:solidFill>
-                  <a:srgbClr val="333333"/>
-                </a:solidFill>
-              </a:defRPr>
-            </a:pPr>
-            <a:r>
-              <a:t>* Zhi Xin (知新): Gain new understanding and new knowledge</a:t>
-            </a:r>
-          </a:p>
-          <a:p>
-            <a:pPr>
-              <a:spcBef>
-                <a:spcPts val="500"/>
-              </a:spcBef>
-              <a:defRPr sz="1700">
-                <a:solidFill>
-                  <a:srgbClr val="333333"/>
-                </a:solidFill>
-              </a:defRPr>
-            </a:pPr>
-            <a:r>
-              <a:t>* Wei Shi (为师): Become a teacher</a:t>
-            </a:r>
-          </a:p>
-        </p:txBody>
-      </p:sp>
-      <p:sp>
-        <p:nvSpPr>
-          <p:cNvPr id="5" name="TextBox 4"/>
-          <p:cNvSpPr txBox="1"/>
-          <p:nvPr/>
-        </p:nvSpPr>
-        <p:spPr>
-          <a:xfrm>
-            <a:off x="8229600" y="6583680"/>
-            <a:ext cx="731520" cy="274320"/>
-          </a:xfrm>
-          <a:prstGeom prst="rect">
-            <a:avLst/>
-          </a:prstGeom>
-          <a:noFill/>
-        </p:spPr>
-        <p:txBody>
-          <a:bodyPr wrap="none">
-            <a:spAutoFit/>
-          </a:bodyPr>
-          <a:lstStyle/>
-          <a:p>
-            <a:pPr algn="r">
-              <a:defRPr sz="1200">
-                <a:solidFill>
-                  <a:srgbClr val="969696"/>
-                </a:solidFill>
-              </a:defRPr>
-            </a:pPr>
-            <a:r>
-              <a:t>9/14</a:t>
             </a:r>
           </a:p>
         </p:txBody>
